--- a/presentations/MANTIS_Presentation_2026-10-30.pptx
+++ b/presentations/MANTIS_Presentation_2026-10-30.pptx
@@ -509,7 +509,7 @@
           <a:lstStyle/>
           <a:p>
             <a:r>
-              <a:t>Quick update, not a full re-introduction: three things landed since the last deck. A real, toggleable integration of the independent Zero Trust Backplane project. A minimal browser UI over the same CLI. And new this week: a toggleable AML office, ported from the legacy codebase MANTIS's banking agents were originally extracted from. Everything is off by default and verified live, not just unit-tested.</a:t>
+              <a:t>This is a quick update, not a full re-introduction -- you've seen MANTIS before. Three things changed since the last time we talked. We wired in a real Zero Trust Backplane. We built a minimal UI on top of the same CLI. And new this week, we added a fourth banking domain: an anti-money-laundering office, ported straight out of the legacy codebase our banking agents originally came from. All of it is off by default, and all of it has been verified against a live run, not just a passing test suite. Let's get into it.</a:t>
             </a:r>
           </a:p>
         </p:txBody>
@@ -579,7 +579,7 @@
           <a:lstStyle/>
           <a:p>
             <a:r>
-              <a:t>One-slide refresher. MANTIS is a configuration-driven security testbed built on a real, unmodified banking multi-agent system. Five fixed control points -- input, agent, interaction, tool, output -- let an attack, failure, or defense plugin declare itself entirely in YAML. Front, mid, and back office are always on: 34 agents, 27 tools. Everything we're covering today -- Zero Trust, the AML office -- is a toggle on top of that unchanged core.</a:t>
+              <a:t>Quick refresher before we get into what's new. MANTIS is a security testbed built on top of a real, unmodified banking multi-agent system -- front office, mid office, back office, all always running: thirty-four agents, twenty-seven tools. The trick is five fixed control points -- input, agent, interaction, tool, output -- so an attack, a failure, or a defense is never a code change. It's just a YAML file that plugs into one of those five points. Keep that in mind, because everything I'm about to show you -- Zero Trust, the AML office -- is just a toggle sitting on top of that same unchanged core.</a:t>
             </a:r>
           </a:p>
         </p:txBody>
@@ -649,7 +649,7 @@
           <a:lstStyle/>
           <a:p>
             <a:r>
-              <a:t>A real integration of the independent Citi_P3_Zero_Trust_Backplane project's signed Policy Decision Point -- not a reimplementation. A stock install never imports it; it's an optional dependency, guarded by a try/except so it's genuinely unregistered rather than registered-but-broken when absent. Toggle it with a dedicated zero_trust block in any config, or the same checkbox in the UI. The policy itself is generated from MANTIS's own live inventory: an agent may act on a tool in its own domain, everything else is denied by the PDP's own default. Live-verified: same-domain allow, cross-domain deny, an unrecognized agent denied before a challenge is even issued, and two full legitimate runs through the real PDP completing identically to the undefended baseline. Eleven regression tests guard it against future drift.</a:t>
+              <a:t>So, first, Zero Trust. This isn't something we built from scratch -- it's a real integration of an independent project, the Citi_P3 Zero Trust Backplane, and its actual signed policy decision point. We didn't reimplement it, we wired the real thing in. By default it isn't even imported -- it's an optional dependency behind a try/except, so a normal install never touches it. You turn it on with one block in the config, or one checkbox in the UI. The policy itself comes straight from MANTIS's own live inventory: an agent can act on a tool in its own domain, and the PDP denies everything else by default. And we didn't just trust that it works, we verified it live. Same-domain requests get allowed. Cross-domain requests get denied. An agent the system doesn't recognize gets denied before it's even challenged. And we ran two full legitimate campaigns through the real PDP and got results identical to the undefended baseline. Eleven regression tests sit on top of that to catch any future drift.</a:t>
             </a:r>
           </a:p>
         </p:txBody>
@@ -719,7 +719,7 @@
           <a:lstStyle/>
           <a:p>
             <a:r>
-              <a:t>A schema-driven experiment editor and trace viewer over the same mantis CLI -- no separate business logic. Validate and Run shell out to the exact same subprocess a terminal user would invoke. Domain, workflow, scenario, and plugin dropdowns are populated live from the running registries, not hardcoded, so they can never drift from the real system. Verified directly: a deliberately invalid config submitted through the UI comes back with the real CLI's own error text, not a UI-side check. Dedicated toggle fieldsets for Zero Trust and, new this week, the AML office sit right next to the generic attack and policy dropdowns -- this is a real screenshot of it running against a real AML office run, not a mockup.</a:t>
+              <a:t>Next, the UI. This is deliberately thin -- there's no separate business logic hiding behind it. Validate and Run literally shell out to the same mantis CLI command you'd type in a terminal yourself. The dropdowns -- domain, workflow, scenario, plugin -- are populated live from the real running registries, so they can never drift out of sync with the actual system. We proved that by deliberately submitting a broken config through the UI, and it came back with the exact same error text the CLI itself gives you. What you're looking at on the left is a real screenshot, not a mockup. It's the UI running an actual AML office campaign, with dedicated toggles for Zero Trust and the AML office sitting right next to the existing attack and policy options.</a:t>
             </a:r>
           </a:p>
         </p:txBody>
@@ -789,7 +789,7 @@
           <a:lstStyle/>
           <a:p>
             <a:r>
-              <a:t>MANTIS's banking agents were extracted from a larger legacy codebase, Citi_P3. That legacy codebase had a working AML investigation office -- an investigator agent, a SAR drafting agent, four real detection functions -- that never made the transition when the rest was translated into MANTIS. This week we ported it. Four detection functions are unchanged from the source: structuring detection is a real sliding-window cumulative-deposit analysis, threshold-anomaly flags anything over five times a customer's baseline, mule-ring detection is real closed-loop graph traversal over a customer's transaction history, and identity verification is Levenshtein name scoring weighted thirty-thirty-forty against date of birth and ID number. Plus a real alert lifecycle: open, in-investigation, cleared or escalated to SAR. It's a fourth banking domain, off by default, toggled exactly like Zero Trust.</a:t>
+              <a:t>Now, the new piece: the AML office. Quick backstory -- MANTIS's banking agents were originally pulled out of a bigger legacy codebase called Citi_P3. That codebase had a working anti-money-laundering investigation office that never made the move over. This week, we ported it. Four detectors, and we kept the logic exactly as it was in the source -- we didn't reinvent any of it. Structuring detection is a real sliding-window analysis of cumulative deposits. Threshold anomaly flags anything over five times a customer's normal baseline. Mule-ring detection walks the actual transaction graph looking for closed loops. Identity verification scores name similarity against date of birth and ID number, weighted thirty, thirty, forty. On top of all that, there's a real alert lifecycle -- open, under investigation, cleared, or escalated to a SAR filing. It's a fourth banking domain, off by default, and you turn it on exactly the same way you turn on Zero Trust.</a:t>
             </a:r>
           </a:p>
         </p:txBody>
@@ -859,7 +859,7 @@
           <a:lstStyle/>
           <a:p>
             <a:r>
-              <a:t>The whole point of verifying against the real trace, not a clean exit code: live verification against five new AML scenarios found two real integration defects before we could honestly call the extension complete. First, a routing gap -- the identity-verification scenario was misrouted to the front office instead of the AML office, because the root agent's own routing instruction never mentioned identity verification by name. Second, an unreachable capability -- the alert-triage tool existed, was correctly implemented, was unit-tested directly as a function -- but no agent in the actual built tree had it on its toolset at all, so it could never be called live. Neither was caught by the unit test suite, because both are properties of the live agent tree, not of any single ported function in isolation. Both fixed and re-verified live, including one effect confirmed by reading the real database state back afterward, not just trusting the model's own report. All five scenarios now score 1.0 on tool-use correctness and workflow outcome, every time.</a:t>
+              <a:t>Here's the part I actually want to spend time on, because it's the whole point of verifying against a live trace instead of a clean exit code. When we ran five new AML scenarios live, we found two real bugs -- not in the ported logic itself, but in how it was wired into the agent tree. First, a routing gap. Identity-verification requests were going to the front office instead of the AML office, because the root agent's own instructions never mentioned identity verification by name. Second, an unreachable capability. The alert-triage tool was implemented correctly, and it even passed its own unit test as a standalone function. But no agent in the actual built tree had it on its toolset, so in a real run it could never be called. Neither one would have shown up in the unit suite, because both are bugs in the live agent tree, not in any one function. We fixed both, and re-verified live, including reading the actual database state back afterward to confirm the fix -- not just trusting what the model reported. All five scenarios now score perfectly, every time.</a:t>
             </a:r>
           </a:p>
         </p:txBody>
@@ -929,7 +929,7 @@
           <a:lstStyle/>
           <a:p>
             <a:r>
-              <a:t>Both toggles follow the identical discipline: opt-in, off by default, byte-identical existing behavior when absent, live-verified rather than just unit-tested. The full offline test suite stands at 853 passing with neither optional dependency installed, 880 with both Zero Trust and AML installed, zero failures either way. Every capability here -- Zero Trust, the AML office, the UI -- is reproducible from a committed configuration file against the real backend and a real model, not a one-off claim.</a:t>
+              <a:t>So, where does that leave us. Both toggles follow the exact same discipline: opt-in, off by default, byte-identical behavior when they're not turned on, and verified live rather than just unit-tested. Right now the full suite stands at 853 tests passing with neither optional dependency installed, and 880 passing with both Zero Trust and the AML office installed -- zero failures, either way. And every single thing I've shown you today is reproducible. Pick up the committed config file, run it against the real backend and a real model, and you get the same result.</a:t>
             </a:r>
           </a:p>
         </p:txBody>
@@ -999,7 +999,7 @@
           <a:lstStyle/>
           <a:p>
             <a:r>
-              <a:t>That's the update: a real Zero Trust Backplane integration, a minimal UI over the same CLI, and this week's AML office, ported faithfully from Citi_P3 and live-verified hard enough to find and fix two real bugs before calling it done. Code, both papers, and the platform guide are all in the repository.</a:t>
+              <a:t>That's the update. A real Zero Trust integration, a thin UI over the same CLI, and this week's AML office -- ported faithfully, and verified hard enough that we found and fixed two real bugs before calling it done. Everything -- code, both papers, the platform guide -- is in the repo if you want to dig into it. So: what should we verify live next?</a:t>
             </a:r>
           </a:p>
         </p:txBody>

--- a/presentations/MANTIS_Presentation_2026-10-30.pptx
+++ b/presentations/MANTIS_Presentation_2026-10-30.pptx
@@ -4,17 +4,19 @@
   <p:sldMasterIdLst>
     <p:sldMasterId id="2147483648" r:id="rId1"/>
   </p:sldMasterIdLst>
+  <p:notesMasterIdLst>
+    <p:notesMasterId r:id="rId9"/>
+  </p:notesMasterIdLst>
   <p:sldIdLst>
-    <p:sldId id="256" r:id="rId7"/>
-    <p:sldId id="257" r:id="rId9"/>
-    <p:sldId id="258" r:id="rId10"/>
-    <p:sldId id="259" r:id="rId11"/>
-    <p:sldId id="260" r:id="rId12"/>
-    <p:sldId id="261" r:id="rId13"/>
-    <p:sldId id="262" r:id="rId14"/>
-    <p:sldId id="263" r:id="rId15"/>
+    <p:sldId id="256" r:id="rId2"/>
+    <p:sldId id="257" r:id="rId3"/>
+    <p:sldId id="258" r:id="rId4"/>
+    <p:sldId id="259" r:id="rId5"/>
+    <p:sldId id="260" r:id="rId6"/>
+    <p:sldId id="261" r:id="rId7"/>
+    <p:sldId id="262" r:id="rId8"/>
   </p:sldIdLst>
-  <p:sldSz cx="12191695" cy="6858000" type="screen4x3"/>
+  <p:sldSz cx="12192000" cy="6858000"/>
   <p:notesSz cx="6858000" cy="9144000"/>
   <p:defaultTextStyle>
     <a:defPPr>
@@ -111,11 +113,27 @@
       </a:defRPr>
     </a:lvl9pPr>
   </p:defaultTextStyle>
+  <p:extLst>
+    <p:ext uri="{EFAFB233-063F-42B5-8137-9DF3F51BA10A}">
+      <p15:sldGuideLst xmlns:p15="http://schemas.microsoft.com/office/powerpoint/2012/main">
+        <p15:guide id="1" orient="horz" pos="2160">
+          <p15:clr>
+            <a:srgbClr val="A4A3A4"/>
+          </p15:clr>
+        </p15:guide>
+        <p15:guide id="2" pos="2880">
+          <p15:clr>
+            <a:srgbClr val="A4A3A4"/>
+          </p15:clr>
+        </p15:guide>
+      </p15:sldGuideLst>
+    </p:ext>
+  </p:extLst>
 </p:presentation>
 </file>
 
 <file path=ppt/notesMasters/notesMaster1.xml><?xml version="1.0" encoding="utf-8"?>
-<p:notesMaster xmlns:a="http://schemas.openxmlformats.org/drawingml/2006/main" xmlns:p="http://schemas.openxmlformats.org/presentationml/2006/main" xmlns:r="http://schemas.openxmlformats.org/officeDocument/2006/relationships">
+<p:notesMaster xmlns:a="http://schemas.openxmlformats.org/drawingml/2006/main" xmlns:r="http://schemas.openxmlformats.org/officeDocument/2006/relationships" xmlns:p="http://schemas.openxmlformats.org/presentationml/2006/main">
   <p:cSld>
     <p:bg>
       <p:bgRef idx="1001">
@@ -136,241 +154,16 @@
           <a:chExt cx="0" cy="0"/>
         </a:xfrm>
       </p:grpSpPr>
-      <p:sp>
-        <p:nvSpPr>
-          <p:cNvPr id="2" name="Header Placeholder 1"/>
-          <p:cNvSpPr>
-            <a:spLocks noGrp="1"/>
-          </p:cNvSpPr>
-          <p:nvPr>
-            <p:ph type="hdr" sz="quarter"/>
-          </p:nvPr>
-        </p:nvSpPr>
-        <p:spPr>
-          <a:xfrm>
-            <a:off x="0" y="0"/>
-            <a:ext cx="2971800" cy="457200"/>
-          </a:xfrm>
-          <a:prstGeom prst="rect">
-            <a:avLst/>
-          </a:prstGeom>
-        </p:spPr>
-        <p:txBody>
-          <a:bodyPr vert="horz" lIns="91440" tIns="45720" rIns="91440" bIns="45720" rtlCol="0"/>
-          <a:lstStyle>
-            <a:lvl1pPr algn="l">
-              <a:defRPr sz="1200"/>
-            </a:lvl1pPr>
-          </a:lstStyle>
-          <a:p>
-            <a:endParaRPr lang="en-US"/>
-          </a:p>
-        </p:txBody>
-      </p:sp>
-      <p:sp>
-        <p:nvSpPr>
-          <p:cNvPr id="3" name="Date Placeholder 2"/>
-          <p:cNvSpPr>
-            <a:spLocks noGrp="1"/>
-          </p:cNvSpPr>
-          <p:nvPr>
-            <p:ph type="dt" idx="1"/>
-          </p:nvPr>
-        </p:nvSpPr>
-        <p:spPr>
-          <a:xfrm>
-            <a:off x="3884613" y="0"/>
-            <a:ext cx="2971800" cy="457200"/>
-          </a:xfrm>
-          <a:prstGeom prst="rect">
-            <a:avLst/>
-          </a:prstGeom>
-        </p:spPr>
-        <p:txBody>
-          <a:bodyPr vert="horz" lIns="91440" tIns="45720" rIns="91440" bIns="45720" rtlCol="0"/>
-          <a:lstStyle>
-            <a:lvl1pPr algn="r">
-              <a:defRPr sz="1200"/>
-            </a:lvl1pPr>
-          </a:lstStyle>
-          <a:p>
-            <a:fld id="{0F89C1C7-3DCD-1040-A9CF-14679D8B5DDD}" type="datetimeFigureOut">
-              <a:rPr lang="en-US" smtClean="0"/>
-              <a:t>10/17/16</a:t>
-            </a:fld>
-            <a:endParaRPr lang="en-US"/>
-          </a:p>
-        </p:txBody>
-      </p:sp>
-      <p:sp>
-        <p:nvSpPr>
-          <p:cNvPr id="4" name="Slide Image Placeholder 3"/>
-          <p:cNvSpPr>
-            <a:spLocks noGrp="1" noRot="1" noChangeAspect="1"/>
-          </p:cNvSpPr>
-          <p:nvPr>
-            <p:ph type="sldImg" idx="2"/>
-          </p:nvPr>
-        </p:nvSpPr>
-        <p:spPr>
-          <a:xfrm>
-            <a:off x="1143000" y="685800"/>
-            <a:ext cx="4572000" cy="3429000"/>
-          </a:xfrm>
-          <a:prstGeom prst="rect">
-            <a:avLst/>
-          </a:prstGeom>
-          <a:noFill/>
-          <a:ln w="12700">
-            <a:solidFill>
-              <a:prstClr val="black"/>
-            </a:solidFill>
-          </a:ln>
-        </p:spPr>
-        <p:txBody>
-          <a:bodyPr vert="horz" lIns="91440" tIns="45720" rIns="91440" bIns="45720" rtlCol="0" anchor="ctr"/>
-          <a:lstStyle/>
-          <a:p>
-            <a:endParaRPr lang="en-US"/>
-          </a:p>
-        </p:txBody>
-      </p:sp>
-      <p:sp>
-        <p:nvSpPr>
-          <p:cNvPr id="5" name="Notes Placeholder 4"/>
-          <p:cNvSpPr>
-            <a:spLocks noGrp="1"/>
-          </p:cNvSpPr>
-          <p:nvPr>
-            <p:ph type="body" sz="quarter" idx="3"/>
-          </p:nvPr>
-        </p:nvSpPr>
-        <p:spPr>
-          <a:xfrm>
-            <a:off x="685800" y="4343400"/>
-            <a:ext cx="5486400" cy="4114800"/>
-          </a:xfrm>
-          <a:prstGeom prst="rect">
-            <a:avLst/>
-          </a:prstGeom>
-        </p:spPr>
-        <p:txBody>
-          <a:bodyPr vert="horz" lIns="91440" tIns="45720" rIns="91440" bIns="45720" rtlCol="0"/>
-          <a:lstStyle/>
-          <a:p>
-            <a:pPr lvl="0"/>
-            <a:r>
-              <a:rPr lang="en-US" smtClean="0"/>
-              <a:t>Click to edit Master text styles</a:t>
-            </a:r>
-          </a:p>
-          <a:p>
-            <a:pPr lvl="1"/>
-            <a:r>
-              <a:rPr lang="en-US" smtClean="0"/>
-              <a:t>Second level</a:t>
-            </a:r>
-          </a:p>
-          <a:p>
-            <a:pPr lvl="2"/>
-            <a:r>
-              <a:rPr lang="en-US" smtClean="0"/>
-              <a:t>Third level</a:t>
-            </a:r>
-          </a:p>
-          <a:p>
-            <a:pPr lvl="3"/>
-            <a:r>
-              <a:rPr lang="en-US" smtClean="0"/>
-              <a:t>Fourth level</a:t>
-            </a:r>
-          </a:p>
-          <a:p>
-            <a:pPr lvl="4"/>
-            <a:r>
-              <a:rPr lang="en-US" smtClean="0"/>
-              <a:t>Fifth level</a:t>
-            </a:r>
-            <a:endParaRPr lang="en-US"/>
-          </a:p>
-        </p:txBody>
-      </p:sp>
-      <p:sp>
-        <p:nvSpPr>
-          <p:cNvPr id="6" name="Footer Placeholder 5"/>
-          <p:cNvSpPr>
-            <a:spLocks noGrp="1"/>
-          </p:cNvSpPr>
-          <p:nvPr>
-            <p:ph type="ftr" sz="quarter" idx="4"/>
-          </p:nvPr>
-        </p:nvSpPr>
-        <p:spPr>
-          <a:xfrm>
-            <a:off x="0" y="8685213"/>
-            <a:ext cx="2971800" cy="457200"/>
-          </a:xfrm>
-          <a:prstGeom prst="rect">
-            <a:avLst/>
-          </a:prstGeom>
-        </p:spPr>
-        <p:txBody>
-          <a:bodyPr vert="horz" lIns="91440" tIns="45720" rIns="91440" bIns="45720" rtlCol="0" anchor="b"/>
-          <a:lstStyle>
-            <a:lvl1pPr algn="l">
-              <a:defRPr sz="1200"/>
-            </a:lvl1pPr>
-          </a:lstStyle>
-          <a:p>
-            <a:endParaRPr lang="en-US"/>
-          </a:p>
-        </p:txBody>
-      </p:sp>
-      <p:sp>
-        <p:nvSpPr>
-          <p:cNvPr id="7" name="Slide Number Placeholder 6"/>
-          <p:cNvSpPr>
-            <a:spLocks noGrp="1"/>
-          </p:cNvSpPr>
-          <p:nvPr>
-            <p:ph type="sldNum" sz="quarter" idx="5"/>
-          </p:nvPr>
-        </p:nvSpPr>
-        <p:spPr>
-          <a:xfrm>
-            <a:off x="3884613" y="8685213"/>
-            <a:ext cx="2971800" cy="457200"/>
-          </a:xfrm>
-          <a:prstGeom prst="rect">
-            <a:avLst/>
-          </a:prstGeom>
-        </p:spPr>
-        <p:txBody>
-          <a:bodyPr vert="horz" lIns="91440" tIns="45720" rIns="91440" bIns="45720" rtlCol="0" anchor="b"/>
-          <a:lstStyle>
-            <a:lvl1pPr algn="r">
-              <a:defRPr sz="1200"/>
-            </a:lvl1pPr>
-          </a:lstStyle>
-          <a:p>
-            <a:fld id="{BB5E49A5-4136-284D-997B-48E1D791AD67}" type="slidenum">
-              <a:rPr lang="en-US" smtClean="0"/>
-              <a:t>‹#›</a:t>
-            </a:fld>
-            <a:endParaRPr lang="en-US"/>
-          </a:p>
-        </p:txBody>
-      </p:sp>
     </p:spTree>
     <p:extLst>
       <p:ext uri="{BB962C8B-B14F-4D97-AF65-F5344CB8AC3E}">
-        <p14:creationId xmlns:p14="http://schemas.microsoft.com/office/powerpoint/2010/main" val="2623252185"/>
+        <p14:creationId xmlns:p14="http://schemas.microsoft.com/office/powerpoint/2010/main" val="1729988921"/>
       </p:ext>
     </p:extLst>
   </p:cSld>
   <p:clrMap bg1="lt1" tx1="dk1" bg2="lt2" tx2="dk2" accent1="accent1" accent2="accent2" accent3="accent3" accent4="accent4" accent5="accent5" accent6="accent6" hlink="hlink" folHlink="folHlink"/>
   <p:notesStyle>
-    <a:lvl1pPr marL="0" algn="l" defTabSz="457200" rtl="0" eaLnBrk="1" latinLnBrk="0" hangingPunct="1">
+    <a:lvl1pPr marL="0" algn="l" defTabSz="914400" rtl="0" eaLnBrk="1" latinLnBrk="0" hangingPunct="1">
       <a:defRPr sz="1200" kern="1200">
         <a:solidFill>
           <a:schemeClr val="tx1"/>
@@ -380,7 +173,7 @@
         <a:cs typeface="+mn-cs"/>
       </a:defRPr>
     </a:lvl1pPr>
-    <a:lvl2pPr marL="457200" algn="l" defTabSz="457200" rtl="0" eaLnBrk="1" latinLnBrk="0" hangingPunct="1">
+    <a:lvl2pPr marL="457200" algn="l" defTabSz="914400" rtl="0" eaLnBrk="1" latinLnBrk="0" hangingPunct="1">
       <a:defRPr sz="1200" kern="1200">
         <a:solidFill>
           <a:schemeClr val="tx1"/>
@@ -390,7 +183,7 @@
         <a:cs typeface="+mn-cs"/>
       </a:defRPr>
     </a:lvl2pPr>
-    <a:lvl3pPr marL="914400" algn="l" defTabSz="457200" rtl="0" eaLnBrk="1" latinLnBrk="0" hangingPunct="1">
+    <a:lvl3pPr marL="914400" algn="l" defTabSz="914400" rtl="0" eaLnBrk="1" latinLnBrk="0" hangingPunct="1">
       <a:defRPr sz="1200" kern="1200">
         <a:solidFill>
           <a:schemeClr val="tx1"/>
@@ -400,7 +193,7 @@
         <a:cs typeface="+mn-cs"/>
       </a:defRPr>
     </a:lvl3pPr>
-    <a:lvl4pPr marL="1371600" algn="l" defTabSz="457200" rtl="0" eaLnBrk="1" latinLnBrk="0" hangingPunct="1">
+    <a:lvl4pPr marL="1371600" algn="l" defTabSz="914400" rtl="0" eaLnBrk="1" latinLnBrk="0" hangingPunct="1">
       <a:defRPr sz="1200" kern="1200">
         <a:solidFill>
           <a:schemeClr val="tx1"/>
@@ -410,7 +203,7 @@
         <a:cs typeface="+mn-cs"/>
       </a:defRPr>
     </a:lvl4pPr>
-    <a:lvl5pPr marL="1828800" algn="l" defTabSz="457200" rtl="0" eaLnBrk="1" latinLnBrk="0" hangingPunct="1">
+    <a:lvl5pPr marL="1828800" algn="l" defTabSz="914400" rtl="0" eaLnBrk="1" latinLnBrk="0" hangingPunct="1">
       <a:defRPr sz="1200" kern="1200">
         <a:solidFill>
           <a:schemeClr val="tx1"/>
@@ -420,7 +213,7 @@
         <a:cs typeface="+mn-cs"/>
       </a:defRPr>
     </a:lvl5pPr>
-    <a:lvl6pPr marL="2286000" algn="l" defTabSz="457200" rtl="0" eaLnBrk="1" latinLnBrk="0" hangingPunct="1">
+    <a:lvl6pPr marL="2286000" algn="l" defTabSz="914400" rtl="0" eaLnBrk="1" latinLnBrk="0" hangingPunct="1">
       <a:defRPr sz="1200" kern="1200">
         <a:solidFill>
           <a:schemeClr val="tx1"/>
@@ -430,7 +223,7 @@
         <a:cs typeface="+mn-cs"/>
       </a:defRPr>
     </a:lvl6pPr>
-    <a:lvl7pPr marL="2743200" algn="l" defTabSz="457200" rtl="0" eaLnBrk="1" latinLnBrk="0" hangingPunct="1">
+    <a:lvl7pPr marL="2743200" algn="l" defTabSz="914400" rtl="0" eaLnBrk="1" latinLnBrk="0" hangingPunct="1">
       <a:defRPr sz="1200" kern="1200">
         <a:solidFill>
           <a:schemeClr val="tx1"/>
@@ -440,7 +233,7 @@
         <a:cs typeface="+mn-cs"/>
       </a:defRPr>
     </a:lvl7pPr>
-    <a:lvl8pPr marL="3200400" algn="l" defTabSz="457200" rtl="0" eaLnBrk="1" latinLnBrk="0" hangingPunct="1">
+    <a:lvl8pPr marL="3200400" algn="l" defTabSz="914400" rtl="0" eaLnBrk="1" latinLnBrk="0" hangingPunct="1">
       <a:defRPr sz="1200" kern="1200">
         <a:solidFill>
           <a:schemeClr val="tx1"/>
@@ -450,7 +243,7 @@
         <a:cs typeface="+mn-cs"/>
       </a:defRPr>
     </a:lvl8pPr>
-    <a:lvl9pPr marL="3657600" algn="l" defTabSz="457200" rtl="0" eaLnBrk="1" latinLnBrk="0" hangingPunct="1">
+    <a:lvl9pPr marL="3657600" algn="l" defTabSz="914400" rtl="0" eaLnBrk="1" latinLnBrk="0" hangingPunct="1">
       <a:defRPr sz="1200" kern="1200">
         <a:solidFill>
           <a:schemeClr val="tx1"/>
@@ -465,7 +258,7 @@
 </file>
 
 <file path=ppt/notesSlides/notesSlide1.xml><?xml version="1.0" encoding="utf-8"?>
-<p:notes xmlns:a="http://schemas.openxmlformats.org/drawingml/2006/main" xmlns:p="http://schemas.openxmlformats.org/presentationml/2006/main" xmlns:r="http://schemas.openxmlformats.org/officeDocument/2006/relationships">
+<p:notes xmlns:a="http://schemas.openxmlformats.org/drawingml/2006/main" xmlns:r="http://schemas.openxmlformats.org/officeDocument/2006/relationships" xmlns:p="http://schemas.openxmlformats.org/presentationml/2006/main">
   <p:cSld>
     <p:spTree>
       <p:nvGrpSpPr>
@@ -485,7 +278,7 @@
         <p:nvSpPr>
           <p:cNvPr id="2" name="Slide Image Placeholder 1"/>
           <p:cNvSpPr>
-            <a:spLocks noGrp="1"/>
+            <a:spLocks noGrp="1" noRot="1" noChangeAspect="1"/>
           </p:cNvSpPr>
           <p:nvPr>
             <p:ph type="sldImg" idx="2"/>
@@ -500,7 +293,7 @@
             <a:spLocks noGrp="1"/>
           </p:cNvSpPr>
           <p:nvPr>
-            <p:ph type="body" idx="3" sz="quarter"/>
+            <p:ph type="body" sz="quarter" idx="3"/>
           </p:nvPr>
         </p:nvSpPr>
         <p:spPr/>
@@ -521,7 +314,7 @@
             <a:spLocks noGrp="1"/>
           </p:cNvSpPr>
           <p:nvPr>
-            <p:ph type="sldNum" idx="5" sz="quarter"/>
+            <p:ph type="sldNum" sz="quarter" idx="5"/>
           </p:nvPr>
         </p:nvSpPr>
         <p:spPr/>
@@ -535,7 +328,7 @@
 </file>
 
 <file path=ppt/notesSlides/notesSlide2.xml><?xml version="1.0" encoding="utf-8"?>
-<p:notes xmlns:a="http://schemas.openxmlformats.org/drawingml/2006/main" xmlns:p="http://schemas.openxmlformats.org/presentationml/2006/main" xmlns:r="http://schemas.openxmlformats.org/officeDocument/2006/relationships">
+<p:notes xmlns:a="http://schemas.openxmlformats.org/drawingml/2006/main" xmlns:r="http://schemas.openxmlformats.org/officeDocument/2006/relationships" xmlns:p="http://schemas.openxmlformats.org/presentationml/2006/main">
   <p:cSld>
     <p:spTree>
       <p:nvGrpSpPr>
@@ -555,7 +348,7 @@
         <p:nvSpPr>
           <p:cNvPr id="2" name="Slide Image Placeholder 1"/>
           <p:cNvSpPr>
-            <a:spLocks noGrp="1"/>
+            <a:spLocks noGrp="1" noRot="1" noChangeAspect="1"/>
           </p:cNvSpPr>
           <p:nvPr>
             <p:ph type="sldImg" idx="2"/>
@@ -570,7 +363,7 @@
             <a:spLocks noGrp="1"/>
           </p:cNvSpPr>
           <p:nvPr>
-            <p:ph type="body" idx="3" sz="quarter"/>
+            <p:ph type="body" sz="quarter" idx="3"/>
           </p:nvPr>
         </p:nvSpPr>
         <p:spPr/>
@@ -591,7 +384,7 @@
             <a:spLocks noGrp="1"/>
           </p:cNvSpPr>
           <p:nvPr>
-            <p:ph type="sldNum" idx="5" sz="quarter"/>
+            <p:ph type="sldNum" sz="quarter" idx="5"/>
           </p:nvPr>
         </p:nvSpPr>
         <p:spPr/>
@@ -605,7 +398,7 @@
 </file>
 
 <file path=ppt/notesSlides/notesSlide3.xml><?xml version="1.0" encoding="utf-8"?>
-<p:notes xmlns:a="http://schemas.openxmlformats.org/drawingml/2006/main" xmlns:p="http://schemas.openxmlformats.org/presentationml/2006/main" xmlns:r="http://schemas.openxmlformats.org/officeDocument/2006/relationships">
+<p:notes xmlns:a="http://schemas.openxmlformats.org/drawingml/2006/main" xmlns:r="http://schemas.openxmlformats.org/officeDocument/2006/relationships" xmlns:p="http://schemas.openxmlformats.org/presentationml/2006/main">
   <p:cSld>
     <p:spTree>
       <p:nvGrpSpPr>
@@ -625,7 +418,7 @@
         <p:nvSpPr>
           <p:cNvPr id="2" name="Slide Image Placeholder 1"/>
           <p:cNvSpPr>
-            <a:spLocks noGrp="1"/>
+            <a:spLocks noGrp="1" noRot="1" noChangeAspect="1"/>
           </p:cNvSpPr>
           <p:nvPr>
             <p:ph type="sldImg" idx="2"/>
@@ -640,7 +433,7 @@
             <a:spLocks noGrp="1"/>
           </p:cNvSpPr>
           <p:nvPr>
-            <p:ph type="body" idx="3" sz="quarter"/>
+            <p:ph type="body" sz="quarter" idx="3"/>
           </p:nvPr>
         </p:nvSpPr>
         <p:spPr/>
@@ -661,7 +454,7 @@
             <a:spLocks noGrp="1"/>
           </p:cNvSpPr>
           <p:nvPr>
-            <p:ph type="sldNum" idx="5" sz="quarter"/>
+            <p:ph type="sldNum" sz="quarter" idx="5"/>
           </p:nvPr>
         </p:nvSpPr>
         <p:spPr/>
@@ -675,7 +468,7 @@
 </file>
 
 <file path=ppt/notesSlides/notesSlide4.xml><?xml version="1.0" encoding="utf-8"?>
-<p:notes xmlns:a="http://schemas.openxmlformats.org/drawingml/2006/main" xmlns:p="http://schemas.openxmlformats.org/presentationml/2006/main" xmlns:r="http://schemas.openxmlformats.org/officeDocument/2006/relationships">
+<p:notes xmlns:a="http://schemas.openxmlformats.org/drawingml/2006/main" xmlns:r="http://schemas.openxmlformats.org/officeDocument/2006/relationships" xmlns:p="http://schemas.openxmlformats.org/presentationml/2006/main">
   <p:cSld>
     <p:spTree>
       <p:nvGrpSpPr>
@@ -695,7 +488,7 @@
         <p:nvSpPr>
           <p:cNvPr id="2" name="Slide Image Placeholder 1"/>
           <p:cNvSpPr>
-            <a:spLocks noGrp="1"/>
+            <a:spLocks noGrp="1" noRot="1" noChangeAspect="1"/>
           </p:cNvSpPr>
           <p:nvPr>
             <p:ph type="sldImg" idx="2"/>
@@ -710,7 +503,7 @@
             <a:spLocks noGrp="1"/>
           </p:cNvSpPr>
           <p:nvPr>
-            <p:ph type="body" idx="3" sz="quarter"/>
+            <p:ph type="body" sz="quarter" idx="3"/>
           </p:nvPr>
         </p:nvSpPr>
         <p:spPr/>
@@ -731,7 +524,7 @@
             <a:spLocks noGrp="1"/>
           </p:cNvSpPr>
           <p:nvPr>
-            <p:ph type="sldNum" idx="5" sz="quarter"/>
+            <p:ph type="sldNum" sz="quarter" idx="5"/>
           </p:nvPr>
         </p:nvSpPr>
         <p:spPr/>
@@ -745,7 +538,7 @@
 </file>
 
 <file path=ppt/notesSlides/notesSlide5.xml><?xml version="1.0" encoding="utf-8"?>
-<p:notes xmlns:a="http://schemas.openxmlformats.org/drawingml/2006/main" xmlns:p="http://schemas.openxmlformats.org/presentationml/2006/main" xmlns:r="http://schemas.openxmlformats.org/officeDocument/2006/relationships">
+<p:notes xmlns:a="http://schemas.openxmlformats.org/drawingml/2006/main" xmlns:r="http://schemas.openxmlformats.org/officeDocument/2006/relationships" xmlns:p="http://schemas.openxmlformats.org/presentationml/2006/main">
   <p:cSld>
     <p:spTree>
       <p:nvGrpSpPr>
@@ -765,7 +558,7 @@
         <p:nvSpPr>
           <p:cNvPr id="2" name="Slide Image Placeholder 1"/>
           <p:cNvSpPr>
-            <a:spLocks noGrp="1"/>
+            <a:spLocks noGrp="1" noRot="1" noChangeAspect="1"/>
           </p:cNvSpPr>
           <p:nvPr>
             <p:ph type="sldImg" idx="2"/>
@@ -780,7 +573,7 @@
             <a:spLocks noGrp="1"/>
           </p:cNvSpPr>
           <p:nvPr>
-            <p:ph type="body" idx="3" sz="quarter"/>
+            <p:ph type="body" sz="quarter" idx="3"/>
           </p:nvPr>
         </p:nvSpPr>
         <p:spPr/>
@@ -801,7 +594,7 @@
             <a:spLocks noGrp="1"/>
           </p:cNvSpPr>
           <p:nvPr>
-            <p:ph type="sldNum" idx="5" sz="quarter"/>
+            <p:ph type="sldNum" sz="quarter" idx="5"/>
           </p:nvPr>
         </p:nvSpPr>
         <p:spPr/>
@@ -815,7 +608,7 @@
 </file>
 
 <file path=ppt/notesSlides/notesSlide6.xml><?xml version="1.0" encoding="utf-8"?>
-<p:notes xmlns:a="http://schemas.openxmlformats.org/drawingml/2006/main" xmlns:p="http://schemas.openxmlformats.org/presentationml/2006/main" xmlns:r="http://schemas.openxmlformats.org/officeDocument/2006/relationships">
+<p:notes xmlns:a="http://schemas.openxmlformats.org/drawingml/2006/main" xmlns:r="http://schemas.openxmlformats.org/officeDocument/2006/relationships" xmlns:p="http://schemas.openxmlformats.org/presentationml/2006/main">
   <p:cSld>
     <p:spTree>
       <p:nvGrpSpPr>
@@ -835,7 +628,7 @@
         <p:nvSpPr>
           <p:cNvPr id="2" name="Slide Image Placeholder 1"/>
           <p:cNvSpPr>
-            <a:spLocks noGrp="1"/>
+            <a:spLocks noGrp="1" noRot="1" noChangeAspect="1"/>
           </p:cNvSpPr>
           <p:nvPr>
             <p:ph type="sldImg" idx="2"/>
@@ -850,7 +643,7 @@
             <a:spLocks noGrp="1"/>
           </p:cNvSpPr>
           <p:nvPr>
-            <p:ph type="body" idx="3" sz="quarter"/>
+            <p:ph type="body" sz="quarter" idx="3"/>
           </p:nvPr>
         </p:nvSpPr>
         <p:spPr/>
@@ -871,7 +664,7 @@
             <a:spLocks noGrp="1"/>
           </p:cNvSpPr>
           <p:nvPr>
-            <p:ph type="sldNum" idx="5" sz="quarter"/>
+            <p:ph type="sldNum" sz="quarter" idx="5"/>
           </p:nvPr>
         </p:nvSpPr>
         <p:spPr/>
@@ -885,7 +678,7 @@
 </file>
 
 <file path=ppt/notesSlides/notesSlide7.xml><?xml version="1.0" encoding="utf-8"?>
-<p:notes xmlns:a="http://schemas.openxmlformats.org/drawingml/2006/main" xmlns:p="http://schemas.openxmlformats.org/presentationml/2006/main" xmlns:r="http://schemas.openxmlformats.org/officeDocument/2006/relationships">
+<p:notes xmlns:a="http://schemas.openxmlformats.org/drawingml/2006/main" xmlns:r="http://schemas.openxmlformats.org/officeDocument/2006/relationships" xmlns:p="http://schemas.openxmlformats.org/presentationml/2006/main">
   <p:cSld>
     <p:spTree>
       <p:nvGrpSpPr>
@@ -905,7 +698,7 @@
         <p:nvSpPr>
           <p:cNvPr id="2" name="Slide Image Placeholder 1"/>
           <p:cNvSpPr>
-            <a:spLocks noGrp="1"/>
+            <a:spLocks noGrp="1" noRot="1" noChangeAspect="1"/>
           </p:cNvSpPr>
           <p:nvPr>
             <p:ph type="sldImg" idx="2"/>
@@ -920,7 +713,7 @@
             <a:spLocks noGrp="1"/>
           </p:cNvSpPr>
           <p:nvPr>
-            <p:ph type="body" idx="3" sz="quarter"/>
+            <p:ph type="body" sz="quarter" idx="3"/>
           </p:nvPr>
         </p:nvSpPr>
         <p:spPr/>
@@ -941,77 +734,7 @@
             <a:spLocks noGrp="1"/>
           </p:cNvSpPr>
           <p:nvPr>
-            <p:ph type="sldNum" idx="5" sz="quarter"/>
-          </p:nvPr>
-        </p:nvSpPr>
-        <p:spPr/>
-      </p:sp>
-    </p:spTree>
-  </p:cSld>
-  <p:clrMapOvr>
-    <a:masterClrMapping/>
-  </p:clrMapOvr>
-</p:notes>
-</file>
-
-<file path=ppt/notesSlides/notesSlide8.xml><?xml version="1.0" encoding="utf-8"?>
-<p:notes xmlns:a="http://schemas.openxmlformats.org/drawingml/2006/main" xmlns:p="http://schemas.openxmlformats.org/presentationml/2006/main" xmlns:r="http://schemas.openxmlformats.org/officeDocument/2006/relationships">
-  <p:cSld>
-    <p:spTree>
-      <p:nvGrpSpPr>
-        <p:cNvPr id="1" name=""/>
-        <p:cNvGrpSpPr/>
-        <p:nvPr/>
-      </p:nvGrpSpPr>
-      <p:grpSpPr>
-        <a:xfrm>
-          <a:off x="0" y="0"/>
-          <a:ext cx="0" cy="0"/>
-          <a:chOff x="0" y="0"/>
-          <a:chExt cx="0" cy="0"/>
-        </a:xfrm>
-      </p:grpSpPr>
-      <p:sp>
-        <p:nvSpPr>
-          <p:cNvPr id="2" name="Slide Image Placeholder 1"/>
-          <p:cNvSpPr>
-            <a:spLocks noGrp="1"/>
-          </p:cNvSpPr>
-          <p:nvPr>
-            <p:ph type="sldImg" idx="2"/>
-          </p:nvPr>
-        </p:nvSpPr>
-        <p:spPr/>
-      </p:sp>
-      <p:sp>
-        <p:nvSpPr>
-          <p:cNvPr id="3" name="Notes Placeholder 2"/>
-          <p:cNvSpPr>
-            <a:spLocks noGrp="1"/>
-          </p:cNvSpPr>
-          <p:nvPr>
-            <p:ph type="body" idx="3" sz="quarter"/>
-          </p:nvPr>
-        </p:nvSpPr>
-        <p:spPr/>
-        <p:txBody>
-          <a:bodyPr/>
-          <a:lstStyle/>
-          <a:p>
-            <a:r>
-              <a:t>That's the update. A real Zero Trust integration, a thin UI over the same CLI, and this week's AML office -- ported faithfully, and verified hard enough that we found and fixed two real bugs before calling it done. Everything -- code, both papers, the platform guide -- is in the repo if you want to dig into it. So: what should we verify live next?</a:t>
-            </a:r>
-          </a:p>
-        </p:txBody>
-      </p:sp>
-      <p:sp>
-        <p:nvSpPr>
-          <p:cNvPr id="4" name="Slide Number Placeholder 3"/>
-          <p:cNvSpPr>
-            <a:spLocks noGrp="1"/>
-          </p:cNvSpPr>
-          <p:nvPr>
-            <p:ph type="sldNum" idx="5" sz="quarter"/>
+            <p:ph type="sldNum" sz="quarter" idx="5"/>
           </p:nvPr>
         </p:nvSpPr>
         <p:spPr/>
@@ -1062,10 +785,9 @@
           <a:lstStyle/>
           <a:p>
             <a:r>
-              <a:rPr lang="en-US" smtClean="0"/>
+              <a:rPr lang="en-US"/>
               <a:t>Click to edit Master title style</a:t>
             </a:r>
-            <a:endParaRPr lang="en-US"/>
           </a:p>
         </p:txBody>
       </p:sp>
@@ -1181,10 +903,9 @@
           </a:lstStyle>
           <a:p>
             <a:r>
-              <a:rPr lang="en-US" smtClean="0"/>
+              <a:rPr lang="en-US"/>
               <a:t>Click to edit Master subtitle style</a:t>
             </a:r>
-            <a:endParaRPr lang="en-US"/>
           </a:p>
         </p:txBody>
       </p:sp>
@@ -1205,7 +926,7 @@
           <a:p>
             <a:fld id="{5BCAD085-E8A6-8845-BD4E-CB4CCA059FC4}" type="datetimeFigureOut">
               <a:rPr lang="en-US" smtClean="0"/>
-              <a:t>1/27/13</a:t>
+              <a:t>10/29/26</a:t>
             </a:fld>
             <a:endParaRPr lang="en-US"/>
           </a:p>
@@ -1299,10 +1020,9 @@
           <a:lstStyle/>
           <a:p>
             <a:r>
-              <a:rPr lang="en-US" smtClean="0"/>
+              <a:rPr lang="en-US"/>
               <a:t>Click to edit Master title style</a:t>
             </a:r>
-            <a:endParaRPr lang="en-US"/>
           </a:p>
         </p:txBody>
       </p:sp>
@@ -1323,38 +1043,37 @@
           <a:p>
             <a:pPr lvl="0"/>
             <a:r>
-              <a:rPr lang="en-US" smtClean="0"/>
+              <a:rPr lang="en-US"/>
               <a:t>Click to edit Master text styles</a:t>
             </a:r>
           </a:p>
           <a:p>
             <a:pPr lvl="1"/>
             <a:r>
-              <a:rPr lang="en-US" smtClean="0"/>
+              <a:rPr lang="en-US"/>
               <a:t>Second level</a:t>
             </a:r>
           </a:p>
           <a:p>
             <a:pPr lvl="2"/>
             <a:r>
-              <a:rPr lang="en-US" smtClean="0"/>
+              <a:rPr lang="en-US"/>
               <a:t>Third level</a:t>
             </a:r>
           </a:p>
           <a:p>
             <a:pPr lvl="3"/>
             <a:r>
-              <a:rPr lang="en-US" smtClean="0"/>
+              <a:rPr lang="en-US"/>
               <a:t>Fourth level</a:t>
             </a:r>
           </a:p>
           <a:p>
             <a:pPr lvl="4"/>
             <a:r>
-              <a:rPr lang="en-US" smtClean="0"/>
+              <a:rPr lang="en-US"/>
               <a:t>Fifth level</a:t>
             </a:r>
-            <a:endParaRPr lang="en-US"/>
           </a:p>
         </p:txBody>
       </p:sp>
@@ -1375,7 +1094,7 @@
           <a:p>
             <a:fld id="{5BCAD085-E8A6-8845-BD4E-CB4CCA059FC4}" type="datetimeFigureOut">
               <a:rPr lang="en-US" smtClean="0"/>
-              <a:t>1/27/13</a:t>
+              <a:t>10/29/26</a:t>
             </a:fld>
             <a:endParaRPr lang="en-US"/>
           </a:p>
@@ -1474,10 +1193,9 @@
           <a:lstStyle/>
           <a:p>
             <a:r>
-              <a:rPr lang="en-US" smtClean="0"/>
+              <a:rPr lang="en-US"/>
               <a:t>Click to edit Master title style</a:t>
             </a:r>
-            <a:endParaRPr lang="en-US"/>
           </a:p>
         </p:txBody>
       </p:sp>
@@ -1503,38 +1221,37 @@
           <a:p>
             <a:pPr lvl="0"/>
             <a:r>
-              <a:rPr lang="en-US" smtClean="0"/>
+              <a:rPr lang="en-US"/>
               <a:t>Click to edit Master text styles</a:t>
             </a:r>
           </a:p>
           <a:p>
             <a:pPr lvl="1"/>
             <a:r>
-              <a:rPr lang="en-US" smtClean="0"/>
+              <a:rPr lang="en-US"/>
               <a:t>Second level</a:t>
             </a:r>
           </a:p>
           <a:p>
             <a:pPr lvl="2"/>
             <a:r>
-              <a:rPr lang="en-US" smtClean="0"/>
+              <a:rPr lang="en-US"/>
               <a:t>Third level</a:t>
             </a:r>
           </a:p>
           <a:p>
             <a:pPr lvl="3"/>
             <a:r>
-              <a:rPr lang="en-US" smtClean="0"/>
+              <a:rPr lang="en-US"/>
               <a:t>Fourth level</a:t>
             </a:r>
           </a:p>
           <a:p>
             <a:pPr lvl="4"/>
             <a:r>
-              <a:rPr lang="en-US" smtClean="0"/>
+              <a:rPr lang="en-US"/>
               <a:t>Fifth level</a:t>
             </a:r>
-            <a:endParaRPr lang="en-US"/>
           </a:p>
         </p:txBody>
       </p:sp>
@@ -1555,7 +1272,7 @@
           <a:p>
             <a:fld id="{5BCAD085-E8A6-8845-BD4E-CB4CCA059FC4}" type="datetimeFigureOut">
               <a:rPr lang="en-US" smtClean="0"/>
-              <a:t>1/27/13</a:t>
+              <a:t>10/29/26</a:t>
             </a:fld>
             <a:endParaRPr lang="en-US"/>
           </a:p>
@@ -1649,10 +1366,9 @@
           <a:lstStyle/>
           <a:p>
             <a:r>
-              <a:rPr lang="en-US" smtClean="0"/>
+              <a:rPr lang="en-US"/>
               <a:t>Click to edit Master title style</a:t>
             </a:r>
-            <a:endParaRPr lang="en-US"/>
           </a:p>
         </p:txBody>
       </p:sp>
@@ -1673,38 +1389,37 @@
           <a:p>
             <a:pPr lvl="0"/>
             <a:r>
-              <a:rPr lang="en-US" smtClean="0"/>
+              <a:rPr lang="en-US"/>
               <a:t>Click to edit Master text styles</a:t>
             </a:r>
           </a:p>
           <a:p>
             <a:pPr lvl="1"/>
             <a:r>
-              <a:rPr lang="en-US" smtClean="0"/>
+              <a:rPr lang="en-US"/>
               <a:t>Second level</a:t>
             </a:r>
           </a:p>
           <a:p>
             <a:pPr lvl="2"/>
             <a:r>
-              <a:rPr lang="en-US" smtClean="0"/>
+              <a:rPr lang="en-US"/>
               <a:t>Third level</a:t>
             </a:r>
           </a:p>
           <a:p>
             <a:pPr lvl="3"/>
             <a:r>
-              <a:rPr lang="en-US" smtClean="0"/>
+              <a:rPr lang="en-US"/>
               <a:t>Fourth level</a:t>
             </a:r>
           </a:p>
           <a:p>
             <a:pPr lvl="4"/>
             <a:r>
-              <a:rPr lang="en-US" smtClean="0"/>
+              <a:rPr lang="en-US"/>
               <a:t>Fifth level</a:t>
             </a:r>
-            <a:endParaRPr lang="en-US"/>
           </a:p>
         </p:txBody>
       </p:sp>
@@ -1725,7 +1440,7 @@
           <a:p>
             <a:fld id="{5BCAD085-E8A6-8845-BD4E-CB4CCA059FC4}" type="datetimeFigureOut">
               <a:rPr lang="en-US" smtClean="0"/>
-              <a:t>1/27/13</a:t>
+              <a:t>10/29/26</a:t>
             </a:fld>
             <a:endParaRPr lang="en-US"/>
           </a:p>
@@ -1828,10 +1543,9 @@
           </a:lstStyle>
           <a:p>
             <a:r>
-              <a:rPr lang="en-US" smtClean="0"/>
+              <a:rPr lang="en-US"/>
               <a:t>Click to edit Master title style</a:t>
             </a:r>
-            <a:endParaRPr lang="en-US"/>
           </a:p>
         </p:txBody>
       </p:sp>
@@ -1948,7 +1662,7 @@
           <a:p>
             <a:pPr lvl="0"/>
             <a:r>
-              <a:rPr lang="en-US" smtClean="0"/>
+              <a:rPr lang="en-US"/>
               <a:t>Click to edit Master text styles</a:t>
             </a:r>
           </a:p>
@@ -1971,7 +1685,7 @@
           <a:p>
             <a:fld id="{5BCAD085-E8A6-8845-BD4E-CB4CCA059FC4}" type="datetimeFigureOut">
               <a:rPr lang="en-US" smtClean="0"/>
-              <a:t>1/27/13</a:t>
+              <a:t>10/29/26</a:t>
             </a:fld>
             <a:endParaRPr lang="en-US"/>
           </a:p>
@@ -2065,10 +1779,9 @@
           <a:lstStyle/>
           <a:p>
             <a:r>
-              <a:rPr lang="en-US" smtClean="0"/>
+              <a:rPr lang="en-US"/>
               <a:t>Click to edit Master title style</a:t>
             </a:r>
-            <a:endParaRPr lang="en-US"/>
           </a:p>
         </p:txBody>
       </p:sp>
@@ -2122,38 +1835,37 @@
           <a:p>
             <a:pPr lvl="0"/>
             <a:r>
-              <a:rPr lang="en-US" smtClean="0"/>
+              <a:rPr lang="en-US"/>
               <a:t>Click to edit Master text styles</a:t>
             </a:r>
           </a:p>
           <a:p>
             <a:pPr lvl="1"/>
             <a:r>
-              <a:rPr lang="en-US" smtClean="0"/>
+              <a:rPr lang="en-US"/>
               <a:t>Second level</a:t>
             </a:r>
           </a:p>
           <a:p>
             <a:pPr lvl="2"/>
             <a:r>
-              <a:rPr lang="en-US" smtClean="0"/>
+              <a:rPr lang="en-US"/>
               <a:t>Third level</a:t>
             </a:r>
           </a:p>
           <a:p>
             <a:pPr lvl="3"/>
             <a:r>
-              <a:rPr lang="en-US" smtClean="0"/>
+              <a:rPr lang="en-US"/>
               <a:t>Fourth level</a:t>
             </a:r>
           </a:p>
           <a:p>
             <a:pPr lvl="4"/>
             <a:r>
-              <a:rPr lang="en-US" smtClean="0"/>
+              <a:rPr lang="en-US"/>
               <a:t>Fifth level</a:t>
             </a:r>
-            <a:endParaRPr lang="en-US"/>
           </a:p>
         </p:txBody>
       </p:sp>
@@ -2207,38 +1919,37 @@
           <a:p>
             <a:pPr lvl="0"/>
             <a:r>
-              <a:rPr lang="en-US" smtClean="0"/>
+              <a:rPr lang="en-US"/>
               <a:t>Click to edit Master text styles</a:t>
             </a:r>
           </a:p>
           <a:p>
             <a:pPr lvl="1"/>
             <a:r>
-              <a:rPr lang="en-US" smtClean="0"/>
+              <a:rPr lang="en-US"/>
               <a:t>Second level</a:t>
             </a:r>
           </a:p>
           <a:p>
             <a:pPr lvl="2"/>
             <a:r>
-              <a:rPr lang="en-US" smtClean="0"/>
+              <a:rPr lang="en-US"/>
               <a:t>Third level</a:t>
             </a:r>
           </a:p>
           <a:p>
             <a:pPr lvl="3"/>
             <a:r>
-              <a:rPr lang="en-US" smtClean="0"/>
+              <a:rPr lang="en-US"/>
               <a:t>Fourth level</a:t>
             </a:r>
           </a:p>
           <a:p>
             <a:pPr lvl="4"/>
             <a:r>
-              <a:rPr lang="en-US" smtClean="0"/>
+              <a:rPr lang="en-US"/>
               <a:t>Fifth level</a:t>
             </a:r>
-            <a:endParaRPr lang="en-US"/>
           </a:p>
         </p:txBody>
       </p:sp>
@@ -2259,7 +1970,7 @@
           <a:p>
             <a:fld id="{5BCAD085-E8A6-8845-BD4E-CB4CCA059FC4}" type="datetimeFigureOut">
               <a:rPr lang="en-US" smtClean="0"/>
-              <a:t>1/27/13</a:t>
+              <a:t>10/29/26</a:t>
             </a:fld>
             <a:endParaRPr lang="en-US"/>
           </a:p>
@@ -2357,10 +2068,9 @@
           </a:lstStyle>
           <a:p>
             <a:r>
-              <a:rPr lang="en-US" smtClean="0"/>
+              <a:rPr lang="en-US"/>
               <a:t>Click to edit Master title style</a:t>
             </a:r>
-            <a:endParaRPr lang="en-US"/>
           </a:p>
         </p:txBody>
       </p:sp>
@@ -2423,7 +2133,7 @@
           <a:p>
             <a:pPr lvl="0"/>
             <a:r>
-              <a:rPr lang="en-US" smtClean="0"/>
+              <a:rPr lang="en-US"/>
               <a:t>Click to edit Master text styles</a:t>
             </a:r>
           </a:p>
@@ -2479,38 +2189,37 @@
           <a:p>
             <a:pPr lvl="0"/>
             <a:r>
-              <a:rPr lang="en-US" smtClean="0"/>
+              <a:rPr lang="en-US"/>
               <a:t>Click to edit Master text styles</a:t>
             </a:r>
           </a:p>
           <a:p>
             <a:pPr lvl="1"/>
             <a:r>
-              <a:rPr lang="en-US" smtClean="0"/>
+              <a:rPr lang="en-US"/>
               <a:t>Second level</a:t>
             </a:r>
           </a:p>
           <a:p>
             <a:pPr lvl="2"/>
             <a:r>
-              <a:rPr lang="en-US" smtClean="0"/>
+              <a:rPr lang="en-US"/>
               <a:t>Third level</a:t>
             </a:r>
           </a:p>
           <a:p>
             <a:pPr lvl="3"/>
             <a:r>
-              <a:rPr lang="en-US" smtClean="0"/>
+              <a:rPr lang="en-US"/>
               <a:t>Fourth level</a:t>
             </a:r>
           </a:p>
           <a:p>
             <a:pPr lvl="4"/>
             <a:r>
-              <a:rPr lang="en-US" smtClean="0"/>
+              <a:rPr lang="en-US"/>
               <a:t>Fifth level</a:t>
             </a:r>
-            <a:endParaRPr lang="en-US"/>
           </a:p>
         </p:txBody>
       </p:sp>
@@ -2573,7 +2282,7 @@
           <a:p>
             <a:pPr lvl="0"/>
             <a:r>
-              <a:rPr lang="en-US" smtClean="0"/>
+              <a:rPr lang="en-US"/>
               <a:t>Click to edit Master text styles</a:t>
             </a:r>
           </a:p>
@@ -2629,38 +2338,37 @@
           <a:p>
             <a:pPr lvl="0"/>
             <a:r>
-              <a:rPr lang="en-US" smtClean="0"/>
+              <a:rPr lang="en-US"/>
               <a:t>Click to edit Master text styles</a:t>
             </a:r>
           </a:p>
           <a:p>
             <a:pPr lvl="1"/>
             <a:r>
-              <a:rPr lang="en-US" smtClean="0"/>
+              <a:rPr lang="en-US"/>
               <a:t>Second level</a:t>
             </a:r>
           </a:p>
           <a:p>
             <a:pPr lvl="2"/>
             <a:r>
-              <a:rPr lang="en-US" smtClean="0"/>
+              <a:rPr lang="en-US"/>
               <a:t>Third level</a:t>
             </a:r>
           </a:p>
           <a:p>
             <a:pPr lvl="3"/>
             <a:r>
-              <a:rPr lang="en-US" smtClean="0"/>
+              <a:rPr lang="en-US"/>
               <a:t>Fourth level</a:t>
             </a:r>
           </a:p>
           <a:p>
             <a:pPr lvl="4"/>
             <a:r>
-              <a:rPr lang="en-US" smtClean="0"/>
+              <a:rPr lang="en-US"/>
               <a:t>Fifth level</a:t>
             </a:r>
-            <a:endParaRPr lang="en-US"/>
           </a:p>
         </p:txBody>
       </p:sp>
@@ -2681,7 +2389,7 @@
           <a:p>
             <a:fld id="{5BCAD085-E8A6-8845-BD4E-CB4CCA059FC4}" type="datetimeFigureOut">
               <a:rPr lang="en-US" smtClean="0"/>
-              <a:t>1/27/13</a:t>
+              <a:t>10/29/26</a:t>
             </a:fld>
             <a:endParaRPr lang="en-US"/>
           </a:p>
@@ -2775,10 +2483,9 @@
           <a:lstStyle/>
           <a:p>
             <a:r>
-              <a:rPr lang="en-US" smtClean="0"/>
+              <a:rPr lang="en-US"/>
               <a:t>Click to edit Master title style</a:t>
             </a:r>
-            <a:endParaRPr lang="en-US"/>
           </a:p>
         </p:txBody>
       </p:sp>
@@ -2799,7 +2506,7 @@
           <a:p>
             <a:fld id="{5BCAD085-E8A6-8845-BD4E-CB4CCA059FC4}" type="datetimeFigureOut">
               <a:rPr lang="en-US" smtClean="0"/>
-              <a:t>1/27/13</a:t>
+              <a:t>10/29/26</a:t>
             </a:fld>
             <a:endParaRPr lang="en-US"/>
           </a:p>
@@ -2894,7 +2601,7 @@
           <a:p>
             <a:fld id="{5BCAD085-E8A6-8845-BD4E-CB4CCA059FC4}" type="datetimeFigureOut">
               <a:rPr lang="en-US" smtClean="0"/>
-              <a:t>1/27/13</a:t>
+              <a:t>10/29/26</a:t>
             </a:fld>
             <a:endParaRPr lang="en-US"/>
           </a:p>
@@ -2997,10 +2704,9 @@
           </a:lstStyle>
           <a:p>
             <a:r>
-              <a:rPr lang="en-US" smtClean="0"/>
+              <a:rPr lang="en-US"/>
               <a:t>Click to edit Master title style</a:t>
             </a:r>
-            <a:endParaRPr lang="en-US"/>
           </a:p>
         </p:txBody>
       </p:sp>
@@ -3054,38 +2760,37 @@
           <a:p>
             <a:pPr lvl="0"/>
             <a:r>
-              <a:rPr lang="en-US" smtClean="0"/>
+              <a:rPr lang="en-US"/>
               <a:t>Click to edit Master text styles</a:t>
             </a:r>
           </a:p>
           <a:p>
             <a:pPr lvl="1"/>
             <a:r>
-              <a:rPr lang="en-US" smtClean="0"/>
+              <a:rPr lang="en-US"/>
               <a:t>Second level</a:t>
             </a:r>
           </a:p>
           <a:p>
             <a:pPr lvl="2"/>
             <a:r>
-              <a:rPr lang="en-US" smtClean="0"/>
+              <a:rPr lang="en-US"/>
               <a:t>Third level</a:t>
             </a:r>
           </a:p>
           <a:p>
             <a:pPr lvl="3"/>
             <a:r>
-              <a:rPr lang="en-US" smtClean="0"/>
+              <a:rPr lang="en-US"/>
               <a:t>Fourth level</a:t>
             </a:r>
           </a:p>
           <a:p>
             <a:pPr lvl="4"/>
             <a:r>
-              <a:rPr lang="en-US" smtClean="0"/>
+              <a:rPr lang="en-US"/>
               <a:t>Fifth level</a:t>
             </a:r>
-            <a:endParaRPr lang="en-US"/>
           </a:p>
         </p:txBody>
       </p:sp>
@@ -3148,7 +2853,7 @@
           <a:p>
             <a:pPr lvl="0"/>
             <a:r>
-              <a:rPr lang="en-US" smtClean="0"/>
+              <a:rPr lang="en-US"/>
               <a:t>Click to edit Master text styles</a:t>
             </a:r>
           </a:p>
@@ -3171,7 +2876,7 @@
           <a:p>
             <a:fld id="{5BCAD085-E8A6-8845-BD4E-CB4CCA059FC4}" type="datetimeFigureOut">
               <a:rPr lang="en-US" smtClean="0"/>
-              <a:t>1/27/13</a:t>
+              <a:t>10/29/26</a:t>
             </a:fld>
             <a:endParaRPr lang="en-US"/>
           </a:p>
@@ -3274,10 +2979,9 @@
           </a:lstStyle>
           <a:p>
             <a:r>
-              <a:rPr lang="en-US" smtClean="0"/>
+              <a:rPr lang="en-US"/>
               <a:t>Click to edit Master title style</a:t>
             </a:r>
-            <a:endParaRPr lang="en-US"/>
           </a:p>
         </p:txBody>
       </p:sp>
@@ -3401,7 +3105,7 @@
           <a:p>
             <a:pPr lvl="0"/>
             <a:r>
-              <a:rPr lang="en-US" smtClean="0"/>
+              <a:rPr lang="en-US"/>
               <a:t>Click to edit Master text styles</a:t>
             </a:r>
           </a:p>
@@ -3424,7 +3128,7 @@
           <a:p>
             <a:fld id="{5BCAD085-E8A6-8845-BD4E-CB4CCA059FC4}" type="datetimeFigureOut">
               <a:rPr lang="en-US" smtClean="0"/>
-              <a:t>1/27/13</a:t>
+              <a:t>10/29/26</a:t>
             </a:fld>
             <a:endParaRPr lang="en-US"/>
           </a:p>
@@ -3533,10 +3237,9 @@
           <a:lstStyle/>
           <a:p>
             <a:r>
-              <a:rPr lang="en-US" smtClean="0"/>
+              <a:rPr lang="en-US"/>
               <a:t>Click to edit Master title style</a:t>
             </a:r>
-            <a:endParaRPr lang="en-US"/>
           </a:p>
         </p:txBody>
       </p:sp>
@@ -3567,38 +3270,37 @@
           <a:p>
             <a:pPr lvl="0"/>
             <a:r>
-              <a:rPr lang="en-US" smtClean="0"/>
+              <a:rPr lang="en-US"/>
               <a:t>Click to edit Master text styles</a:t>
             </a:r>
           </a:p>
           <a:p>
             <a:pPr lvl="1"/>
             <a:r>
-              <a:rPr lang="en-US" smtClean="0"/>
+              <a:rPr lang="en-US"/>
               <a:t>Second level</a:t>
             </a:r>
           </a:p>
           <a:p>
             <a:pPr lvl="2"/>
             <a:r>
-              <a:rPr lang="en-US" smtClean="0"/>
+              <a:rPr lang="en-US"/>
               <a:t>Third level</a:t>
             </a:r>
           </a:p>
           <a:p>
             <a:pPr lvl="3"/>
             <a:r>
-              <a:rPr lang="en-US" smtClean="0"/>
+              <a:rPr lang="en-US"/>
               <a:t>Fourth level</a:t>
             </a:r>
           </a:p>
           <a:p>
             <a:pPr lvl="4"/>
             <a:r>
-              <a:rPr lang="en-US" smtClean="0"/>
+              <a:rPr lang="en-US"/>
               <a:t>Fifth level</a:t>
             </a:r>
-            <a:endParaRPr lang="en-US"/>
           </a:p>
         </p:txBody>
       </p:sp>
@@ -3637,7 +3339,7 @@
           <a:p>
             <a:fld id="{5BCAD085-E8A6-8845-BD4E-CB4CCA059FC4}" type="datetimeFigureOut">
               <a:rPr lang="en-US" smtClean="0"/>
-              <a:t>1/27/13</a:t>
+              <a:t>10/29/26</a:t>
             </a:fld>
             <a:endParaRPr lang="en-US"/>
           </a:p>
@@ -3996,7 +3698,7 @@
 </file>
 
 <file path=ppt/slides/slide1.xml><?xml version="1.0" encoding="utf-8"?>
-<p:sld xmlns:a="http://schemas.openxmlformats.org/drawingml/2006/main" xmlns:p="http://schemas.openxmlformats.org/presentationml/2006/main" xmlns:r="http://schemas.openxmlformats.org/officeDocument/2006/relationships">
+<p:sld xmlns:a="http://schemas.openxmlformats.org/drawingml/2006/main" xmlns:r="http://schemas.openxmlformats.org/officeDocument/2006/relationships" xmlns:p="http://schemas.openxmlformats.org/presentationml/2006/main">
   <p:cSld>
     <p:bg>
       <p:bgPr>
@@ -4012,7 +3714,14 @@
         <p:cNvGrpSpPr/>
         <p:nvPr/>
       </p:nvGrpSpPr>
-      <p:grpSpPr/>
+      <p:grpSpPr>
+        <a:xfrm>
+          <a:off x="0" y="0"/>
+          <a:ext cx="0" cy="0"/>
+          <a:chOff x="0" y="0"/>
+          <a:chExt cx="0" cy="0"/>
+        </a:xfrm>
+      </p:grpSpPr>
       <p:sp>
         <p:nvSpPr>
           <p:cNvPr id="2" name="Rectangle 1"/>
@@ -4052,7 +3761,9 @@
         <p:txBody>
           <a:bodyPr rtlCol="0" anchor="ctr"/>
           <a:lstStyle/>
-          <a:p/>
+          <a:p>
+            <a:endParaRPr/>
+          </a:p>
         </p:txBody>
       </p:sp>
       <p:sp>
@@ -4094,7 +3805,9 @@
         <p:txBody>
           <a:bodyPr rtlCol="0" anchor="ctr"/>
           <a:lstStyle/>
-          <a:p/>
+          <a:p>
+            <a:endParaRPr/>
+          </a:p>
         </p:txBody>
       </p:sp>
       <p:sp>
@@ -4114,7 +3827,7 @@
           <a:noFill/>
         </p:spPr>
         <p:txBody>
-          <a:bodyPr wrap="square" lIns="0" rIns="0" tIns="0" bIns="0" anchor="ctr">
+          <a:bodyPr wrap="square" lIns="0" tIns="0" rIns="0" bIns="0" anchor="ctr">
             <a:spAutoFit/>
           </a:bodyPr>
           <a:lstStyle/>
@@ -4156,7 +3869,7 @@
           <a:noFill/>
         </p:spPr>
         <p:txBody>
-          <a:bodyPr wrap="square" lIns="0" rIns="0" tIns="0" bIns="0" anchor="t">
+          <a:bodyPr wrap="square" lIns="0" tIns="0" rIns="0" bIns="0" anchor="t">
             <a:spAutoFit/>
           </a:bodyPr>
           <a:lstStyle/>
@@ -4198,7 +3911,7 @@
           <a:noFill/>
         </p:spPr>
         <p:txBody>
-          <a:bodyPr wrap="square" lIns="0" rIns="0" tIns="0" bIns="0" anchor="t">
+          <a:bodyPr wrap="square" lIns="0" tIns="0" rIns="0" bIns="0" anchor="t">
             <a:spAutoFit/>
           </a:bodyPr>
           <a:lstStyle/>
@@ -4240,7 +3953,7 @@
           <a:noFill/>
         </p:spPr>
         <p:txBody>
-          <a:bodyPr wrap="square" lIns="0" rIns="0" tIns="0" bIns="0" anchor="t">
+          <a:bodyPr wrap="square" lIns="0" tIns="0" rIns="0" bIns="0" anchor="t">
             <a:spAutoFit/>
           </a:bodyPr>
           <a:lstStyle/>
@@ -4274,7 +3987,7 @@
         <p:spPr>
           <a:xfrm>
             <a:off x="731520" y="2103120"/>
-            <a:ext cx="10058400" cy="1554480"/>
+            <a:ext cx="10058400" cy="887679"/>
           </a:xfrm>
           <a:prstGeom prst="rect">
             <a:avLst/>
@@ -4282,7 +3995,7 @@
           <a:noFill/>
         </p:spPr>
         <p:txBody>
-          <a:bodyPr wrap="square" lIns="0" rIns="0" tIns="0" bIns="0" anchor="t">
+          <a:bodyPr wrap="square" lIns="0" tIns="0" rIns="0" bIns="0" anchor="t">
             <a:spAutoFit/>
           </a:bodyPr>
           <a:lstStyle/>
@@ -4296,14 +4009,29 @@
               </a:spcAft>
             </a:pPr>
             <a:r>
-              <a:rPr sz="5600" b="1">
+              <a:rPr sz="5600" b="1" dirty="0">
                 <a:solidFill>
                   <a:srgbClr val="FFFFFF"/>
                 </a:solidFill>
                 <a:latin typeface="Calibri"/>
               </a:rPr>
-              <a:t>MANTIS -- This Week</a:t>
-            </a:r>
+              <a:t>MANTIS -- </a:t>
+            </a:r>
+            <a:r>
+              <a:rPr lang="en-US" sz="5600" b="1" dirty="0">
+                <a:solidFill>
+                  <a:srgbClr val="FFFFFF"/>
+                </a:solidFill>
+                <a:latin typeface="Calibri"/>
+              </a:rPr>
+              <a:t>Updates</a:t>
+            </a:r>
+            <a:endParaRPr sz="5600" b="1" dirty="0">
+              <a:solidFill>
+                <a:srgbClr val="FFFFFF"/>
+              </a:solidFill>
+              <a:latin typeface="Calibri"/>
+            </a:endParaRPr>
           </a:p>
         </p:txBody>
       </p:sp>
@@ -4324,7 +4052,7 @@
           <a:noFill/>
         </p:spPr>
         <p:txBody>
-          <a:bodyPr wrap="square" lIns="0" rIns="0" tIns="0" bIns="0" anchor="t">
+          <a:bodyPr wrap="square" lIns="0" tIns="0" rIns="0" bIns="0" anchor="t">
             <a:spAutoFit/>
           </a:bodyPr>
           <a:lstStyle/>
@@ -4366,7 +4094,7 @@
           <a:noFill/>
         </p:spPr>
         <p:txBody>
-          <a:bodyPr wrap="square" lIns="0" rIns="0" tIns="0" bIns="0" anchor="t">
+          <a:bodyPr wrap="square" lIns="0" tIns="0" rIns="0" bIns="0" anchor="t">
             <a:spAutoFit/>
           </a:bodyPr>
           <a:lstStyle/>
@@ -4408,7 +4136,7 @@
           <a:noFill/>
         </p:spPr>
         <p:txBody>
-          <a:bodyPr wrap="square" lIns="0" rIns="0" tIns="0" bIns="0" anchor="t">
+          <a:bodyPr wrap="square" lIns="0" tIns="0" rIns="0" bIns="0" anchor="t">
             <a:spAutoFit/>
           </a:bodyPr>
           <a:lstStyle/>
@@ -4472,7 +4200,9 @@
         <p:txBody>
           <a:bodyPr rtlCol="0" anchor="ctr"/>
           <a:lstStyle/>
-          <a:p/>
+          <a:p>
+            <a:endParaRPr/>
+          </a:p>
         </p:txBody>
       </p:sp>
       <p:sp>
@@ -4492,7 +4222,7 @@
           <a:noFill/>
         </p:spPr>
         <p:txBody>
-          <a:bodyPr wrap="square" lIns="0" rIns="0" tIns="0" bIns="0" anchor="t">
+          <a:bodyPr wrap="square" lIns="0" tIns="0" rIns="0" bIns="0" anchor="t">
             <a:spAutoFit/>
           </a:bodyPr>
           <a:lstStyle/>
@@ -4556,7 +4286,9 @@
         <p:txBody>
           <a:bodyPr rtlCol="0" anchor="ctr"/>
           <a:lstStyle/>
-          <a:p/>
+          <a:p>
+            <a:endParaRPr/>
+          </a:p>
         </p:txBody>
       </p:sp>
     </p:spTree>
@@ -4568,7 +4300,7 @@
 </file>
 
 <file path=ppt/slides/slide2.xml><?xml version="1.0" encoding="utf-8"?>
-<p:sld xmlns:a="http://schemas.openxmlformats.org/drawingml/2006/main" xmlns:p="http://schemas.openxmlformats.org/presentationml/2006/main" xmlns:r="http://schemas.openxmlformats.org/officeDocument/2006/relationships">
+<p:sld xmlns:a="http://schemas.openxmlformats.org/drawingml/2006/main" xmlns:r="http://schemas.openxmlformats.org/officeDocument/2006/relationships" xmlns:p="http://schemas.openxmlformats.org/presentationml/2006/main">
   <p:cSld>
     <p:bg>
       <p:bgPr>
@@ -4584,7 +4316,14 @@
         <p:cNvGrpSpPr/>
         <p:nvPr/>
       </p:nvGrpSpPr>
-      <p:grpSpPr/>
+      <p:grpSpPr>
+        <a:xfrm>
+          <a:off x="0" y="0"/>
+          <a:ext cx="0" cy="0"/>
+          <a:chOff x="0" y="0"/>
+          <a:chExt cx="0" cy="0"/>
+        </a:xfrm>
+      </p:grpSpPr>
       <p:sp>
         <p:nvSpPr>
           <p:cNvPr id="2" name="TextBox 1"/>
@@ -4602,7 +4341,7 @@
           <a:noFill/>
         </p:spPr>
         <p:txBody>
-          <a:bodyPr wrap="square" lIns="0" rIns="0" tIns="0" bIns="0" anchor="t">
+          <a:bodyPr wrap="square" lIns="0" tIns="0" rIns="0" bIns="0" anchor="t">
             <a:spAutoFit/>
           </a:bodyPr>
           <a:lstStyle/>
@@ -4644,7 +4383,7 @@
           <a:noFill/>
         </p:spPr>
         <p:txBody>
-          <a:bodyPr wrap="square" lIns="0" rIns="0" tIns="0" bIns="0" anchor="t">
+          <a:bodyPr wrap="square" lIns="0" tIns="0" rIns="0" bIns="0" anchor="t">
             <a:spAutoFit/>
           </a:bodyPr>
           <a:lstStyle/>
@@ -4708,7 +4447,9 @@
         <p:txBody>
           <a:bodyPr rtlCol="0" anchor="ctr"/>
           <a:lstStyle/>
-          <a:p/>
+          <a:p>
+            <a:endParaRPr/>
+          </a:p>
         </p:txBody>
       </p:sp>
       <p:sp>
@@ -4728,7 +4469,7 @@
           <a:noFill/>
         </p:spPr>
         <p:txBody>
-          <a:bodyPr wrap="square" lIns="0" rIns="0" tIns="0" bIns="0" anchor="t">
+          <a:bodyPr wrap="square" lIns="0" tIns="0" rIns="0" bIns="0" anchor="t">
             <a:spAutoFit/>
           </a:bodyPr>
           <a:lstStyle/>
@@ -4770,7 +4511,7 @@
           <a:noFill/>
         </p:spPr>
         <p:txBody>
-          <a:bodyPr wrap="square" lIns="0" rIns="0" tIns="0" bIns="0" anchor="t">
+          <a:bodyPr wrap="square" lIns="0" tIns="0" rIns="0" bIns="0" anchor="t">
             <a:spAutoFit/>
           </a:bodyPr>
           <a:lstStyle/>
@@ -4834,7 +4575,9 @@
         <p:txBody>
           <a:bodyPr rtlCol="0" anchor="ctr"/>
           <a:lstStyle/>
-          <a:p/>
+          <a:p>
+            <a:endParaRPr/>
+          </a:p>
         </p:txBody>
       </p:sp>
       <p:sp>
@@ -4854,7 +4597,7 @@
           <a:noFill/>
         </p:spPr>
         <p:txBody>
-          <a:bodyPr wrap="square" lIns="0" rIns="0" tIns="0" bIns="0" anchor="t">
+          <a:bodyPr wrap="square" lIns="0" tIns="0" rIns="0" bIns="0" anchor="t">
             <a:spAutoFit/>
           </a:bodyPr>
           <a:lstStyle/>
@@ -4896,7 +4639,7 @@
           <a:noFill/>
         </p:spPr>
         <p:txBody>
-          <a:bodyPr wrap="square" lIns="0" rIns="0" tIns="0" bIns="0" anchor="t">
+          <a:bodyPr wrap="square" lIns="0" tIns="0" rIns="0" bIns="0" anchor="t">
             <a:spAutoFit/>
           </a:bodyPr>
           <a:lstStyle/>
@@ -4960,7 +4703,9 @@
         <p:txBody>
           <a:bodyPr rtlCol="0" anchor="ctr"/>
           <a:lstStyle/>
-          <a:p/>
+          <a:p>
+            <a:endParaRPr/>
+          </a:p>
         </p:txBody>
       </p:sp>
       <p:sp>
@@ -4980,7 +4725,7 @@
           <a:noFill/>
         </p:spPr>
         <p:txBody>
-          <a:bodyPr wrap="square" lIns="0" rIns="0" tIns="0" bIns="0" anchor="t">
+          <a:bodyPr wrap="square" lIns="0" tIns="0" rIns="0" bIns="0" anchor="t">
             <a:spAutoFit/>
           </a:bodyPr>
           <a:lstStyle/>
@@ -5022,7 +4767,7 @@
           <a:noFill/>
         </p:spPr>
         <p:txBody>
-          <a:bodyPr wrap="square" lIns="0" rIns="0" tIns="0" bIns="0" anchor="t">
+          <a:bodyPr wrap="square" lIns="0" tIns="0" rIns="0" bIns="0" anchor="t">
             <a:spAutoFit/>
           </a:bodyPr>
           <a:lstStyle/>
@@ -5064,7 +4809,7 @@
           <a:noFill/>
         </p:spPr>
         <p:txBody>
-          <a:bodyPr wrap="square" lIns="0" rIns="0" tIns="0" bIns="0" anchor="t">
+          <a:bodyPr wrap="square" lIns="0" tIns="0" rIns="0" bIns="0" anchor="t">
             <a:spAutoFit/>
           </a:bodyPr>
           <a:lstStyle/>
@@ -5130,7 +4875,9 @@
         <p:txBody>
           <a:bodyPr rtlCol="0" anchor="ctr"/>
           <a:lstStyle/>
-          <a:p/>
+          <a:p>
+            <a:endParaRPr/>
+          </a:p>
         </p:txBody>
       </p:sp>
       <p:sp>
@@ -5150,7 +4897,7 @@
           <a:noFill/>
         </p:spPr>
         <p:txBody>
-          <a:bodyPr wrap="square" lIns="0" rIns="0" tIns="0" bIns="0" anchor="t">
+          <a:bodyPr wrap="square" lIns="0" tIns="0" rIns="0" bIns="0" anchor="t">
             <a:spAutoFit/>
           </a:bodyPr>
           <a:lstStyle/>
@@ -5201,7 +4948,7 @@
           <a:noFill/>
         </p:spPr>
         <p:txBody>
-          <a:bodyPr wrap="square" lIns="0" rIns="0" tIns="0" bIns="0" anchor="t">
+          <a:bodyPr wrap="square" lIns="0" tIns="0" rIns="0" bIns="0" anchor="t">
             <a:spAutoFit/>
           </a:bodyPr>
           <a:lstStyle/>
@@ -5265,7 +5012,9 @@
         <p:txBody>
           <a:bodyPr rtlCol="0" anchor="ctr"/>
           <a:lstStyle/>
-          <a:p/>
+          <a:p>
+            <a:endParaRPr/>
+          </a:p>
         </p:txBody>
       </p:sp>
       <p:sp>
@@ -5285,7 +5034,7 @@
           <a:noFill/>
         </p:spPr>
         <p:txBody>
-          <a:bodyPr wrap="square" lIns="0" rIns="0" tIns="0" bIns="0" anchor="t">
+          <a:bodyPr wrap="square" lIns="0" tIns="0" rIns="0" bIns="0" anchor="t">
             <a:spAutoFit/>
           </a:bodyPr>
           <a:lstStyle/>
@@ -5327,7 +5076,7 @@
           <a:noFill/>
         </p:spPr>
         <p:txBody>
-          <a:bodyPr wrap="square" lIns="0" rIns="0" tIns="0" bIns="0" anchor="t">
+          <a:bodyPr wrap="square" lIns="0" tIns="0" rIns="0" bIns="0" anchor="t">
             <a:spAutoFit/>
           </a:bodyPr>
           <a:lstStyle/>
@@ -5361,7 +5110,7 @@
 </file>
 
 <file path=ppt/slides/slide3.xml><?xml version="1.0" encoding="utf-8"?>
-<p:sld xmlns:a="http://schemas.openxmlformats.org/drawingml/2006/main" xmlns:p="http://schemas.openxmlformats.org/presentationml/2006/main" xmlns:r="http://schemas.openxmlformats.org/officeDocument/2006/relationships">
+<p:sld xmlns:a="http://schemas.openxmlformats.org/drawingml/2006/main" xmlns:r="http://schemas.openxmlformats.org/officeDocument/2006/relationships" xmlns:p="http://schemas.openxmlformats.org/presentationml/2006/main">
   <p:cSld>
     <p:bg>
       <p:bgPr>
@@ -5377,7 +5126,14 @@
         <p:cNvGrpSpPr/>
         <p:nvPr/>
       </p:nvGrpSpPr>
-      <p:grpSpPr/>
+      <p:grpSpPr>
+        <a:xfrm>
+          <a:off x="0" y="0"/>
+          <a:ext cx="0" cy="0"/>
+          <a:chOff x="0" y="0"/>
+          <a:chExt cx="0" cy="0"/>
+        </a:xfrm>
+      </p:grpSpPr>
       <p:sp>
         <p:nvSpPr>
           <p:cNvPr id="2" name="TextBox 1"/>
@@ -5395,7 +5151,7 @@
           <a:noFill/>
         </p:spPr>
         <p:txBody>
-          <a:bodyPr wrap="square" lIns="0" rIns="0" tIns="0" bIns="0" anchor="t">
+          <a:bodyPr wrap="square" lIns="0" tIns="0" rIns="0" bIns="0" anchor="t">
             <a:spAutoFit/>
           </a:bodyPr>
           <a:lstStyle/>
@@ -5437,7 +5193,7 @@
           <a:noFill/>
         </p:spPr>
         <p:txBody>
-          <a:bodyPr wrap="square" lIns="0" rIns="0" tIns="0" bIns="0" anchor="t">
+          <a:bodyPr wrap="square" lIns="0" tIns="0" rIns="0" bIns="0" anchor="t">
             <a:spAutoFit/>
           </a:bodyPr>
           <a:lstStyle/>
@@ -5501,7 +5257,9 @@
         <p:txBody>
           <a:bodyPr rtlCol="0" anchor="ctr"/>
           <a:lstStyle/>
-          <a:p/>
+          <a:p>
+            <a:endParaRPr/>
+          </a:p>
         </p:txBody>
       </p:sp>
       <p:sp>
@@ -5521,7 +5279,7 @@
           <a:noFill/>
         </p:spPr>
         <p:txBody>
-          <a:bodyPr wrap="square" lIns="0" rIns="0" tIns="0" bIns="0" anchor="ctr">
+          <a:bodyPr wrap="square" lIns="0" tIns="0" rIns="0" bIns="0" anchor="ctr">
             <a:spAutoFit/>
           </a:bodyPr>
           <a:lstStyle/>
@@ -5585,7 +5343,9 @@
         <p:txBody>
           <a:bodyPr rtlCol="0" anchor="ctr"/>
           <a:lstStyle/>
-          <a:p/>
+          <a:p>
+            <a:endParaRPr/>
+          </a:p>
         </p:txBody>
       </p:sp>
       <p:sp>
@@ -5629,7 +5389,9 @@
         <p:txBody>
           <a:bodyPr rtlCol="0" anchor="ctr"/>
           <a:lstStyle/>
-          <a:p/>
+          <a:p>
+            <a:endParaRPr/>
+          </a:p>
         </p:txBody>
       </p:sp>
       <p:sp>
@@ -5649,7 +5411,7 @@
           <a:noFill/>
         </p:spPr>
         <p:txBody>
-          <a:bodyPr wrap="square" lIns="0" rIns="0" tIns="0" bIns="0" anchor="ctr">
+          <a:bodyPr wrap="square" lIns="0" tIns="0" rIns="0" bIns="0" anchor="ctr">
             <a:spAutoFit/>
           </a:bodyPr>
           <a:lstStyle/>
@@ -5713,7 +5475,9 @@
         <p:txBody>
           <a:bodyPr rtlCol="0" anchor="ctr"/>
           <a:lstStyle/>
-          <a:p/>
+          <a:p>
+            <a:endParaRPr/>
+          </a:p>
         </p:txBody>
       </p:sp>
       <p:sp>
@@ -5755,7 +5519,9 @@
         <p:txBody>
           <a:bodyPr rtlCol="0" anchor="ctr"/>
           <a:lstStyle/>
-          <a:p/>
+          <a:p>
+            <a:endParaRPr/>
+          </a:p>
         </p:txBody>
       </p:sp>
       <p:sp>
@@ -5775,7 +5541,7 @@
           <a:noFill/>
         </p:spPr>
         <p:txBody>
-          <a:bodyPr wrap="square" lIns="0" rIns="0" tIns="0" bIns="0" anchor="ctr">
+          <a:bodyPr wrap="square" lIns="0" tIns="0" rIns="0" bIns="0" anchor="ctr">
             <a:spAutoFit/>
           </a:bodyPr>
           <a:lstStyle/>
@@ -5839,7 +5605,9 @@
         <p:txBody>
           <a:bodyPr rtlCol="0" anchor="ctr"/>
           <a:lstStyle/>
-          <a:p/>
+          <a:p>
+            <a:endParaRPr/>
+          </a:p>
         </p:txBody>
       </p:sp>
       <p:sp>
@@ -5859,7 +5627,7 @@
           <a:noFill/>
         </p:spPr>
         <p:txBody>
-          <a:bodyPr wrap="square" lIns="0" rIns="0" tIns="0" bIns="0" anchor="ctr">
+          <a:bodyPr wrap="square" lIns="0" tIns="0" rIns="0" bIns="0" anchor="ctr">
             <a:spAutoFit/>
           </a:bodyPr>
           <a:lstStyle/>
@@ -5901,7 +5669,7 @@
           <a:noFill/>
         </p:spPr>
         <p:txBody>
-          <a:bodyPr wrap="square" lIns="0" rIns="0" tIns="0" bIns="0" anchor="t">
+          <a:bodyPr wrap="square" lIns="0" tIns="0" rIns="0" bIns="0" anchor="t">
             <a:spAutoFit/>
           </a:bodyPr>
           <a:lstStyle/>
@@ -5967,7 +5735,9 @@
         <p:txBody>
           <a:bodyPr rtlCol="0" anchor="ctr"/>
           <a:lstStyle/>
-          <a:p/>
+          <a:p>
+            <a:endParaRPr/>
+          </a:p>
         </p:txBody>
       </p:sp>
       <p:sp>
@@ -5987,7 +5757,7 @@
           <a:noFill/>
         </p:spPr>
         <p:txBody>
-          <a:bodyPr wrap="square" lIns="0" rIns="0" tIns="0" bIns="0" anchor="t">
+          <a:bodyPr wrap="square" lIns="0" tIns="0" rIns="0" bIns="0" anchor="t">
             <a:spAutoFit/>
           </a:bodyPr>
           <a:lstStyle/>
@@ -6029,7 +5799,7 @@
           <a:noFill/>
         </p:spPr>
         <p:txBody>
-          <a:bodyPr wrap="square" lIns="0" rIns="0" tIns="0" bIns="0" anchor="t">
+          <a:bodyPr wrap="square" lIns="0" tIns="0" rIns="0" bIns="0" anchor="t">
             <a:spAutoFit/>
           </a:bodyPr>
           <a:lstStyle/>
@@ -6136,7 +5906,7 @@
           <a:noFill/>
         </p:spPr>
         <p:txBody>
-          <a:bodyPr wrap="square" lIns="0" rIns="0" tIns="0" bIns="0" anchor="t">
+          <a:bodyPr wrap="square" lIns="0" tIns="0" rIns="0" bIns="0" anchor="t">
             <a:spAutoFit/>
           </a:bodyPr>
           <a:lstStyle/>
@@ -6198,7 +5968,7 @@
           </a:fontRef>
         </p:style>
         <p:txBody>
-          <a:bodyPr rtlCol="0" anchor="ctr" lIns="0" rIns="0" tIns="0" bIns="0"/>
+          <a:bodyPr lIns="0" tIns="0" rIns="0" bIns="0" rtlCol="0" anchor="ctr"/>
           <a:lstStyle/>
           <a:p>
             <a:pPr algn="ctr"/>
@@ -6231,7 +6001,7 @@
           <a:noFill/>
         </p:spPr>
         <p:txBody>
-          <a:bodyPr wrap="square" lIns="0" rIns="0" tIns="0" bIns="0" anchor="ctr">
+          <a:bodyPr wrap="square" lIns="0" tIns="0" rIns="0" bIns="0" anchor="ctr">
             <a:spAutoFit/>
           </a:bodyPr>
           <a:lstStyle/>
@@ -6293,7 +6063,7 @@
           </a:fontRef>
         </p:style>
         <p:txBody>
-          <a:bodyPr rtlCol="0" anchor="ctr" lIns="0" rIns="0" tIns="0" bIns="0"/>
+          <a:bodyPr lIns="0" tIns="0" rIns="0" bIns="0" rtlCol="0" anchor="ctr"/>
           <a:lstStyle/>
           <a:p>
             <a:pPr algn="ctr"/>
@@ -6326,7 +6096,7 @@
           <a:noFill/>
         </p:spPr>
         <p:txBody>
-          <a:bodyPr wrap="square" lIns="0" rIns="0" tIns="0" bIns="0" anchor="ctr">
+          <a:bodyPr wrap="square" lIns="0" tIns="0" rIns="0" bIns="0" anchor="ctr">
             <a:spAutoFit/>
           </a:bodyPr>
           <a:lstStyle/>
@@ -6388,7 +6158,7 @@
           </a:fontRef>
         </p:style>
         <p:txBody>
-          <a:bodyPr rtlCol="0" anchor="ctr" lIns="0" rIns="0" tIns="0" bIns="0"/>
+          <a:bodyPr lIns="0" tIns="0" rIns="0" bIns="0" rtlCol="0" anchor="ctr"/>
           <a:lstStyle/>
           <a:p>
             <a:pPr algn="ctr"/>
@@ -6421,7 +6191,7 @@
           <a:noFill/>
         </p:spPr>
         <p:txBody>
-          <a:bodyPr wrap="square" lIns="0" rIns="0" tIns="0" bIns="0" anchor="ctr">
+          <a:bodyPr wrap="square" lIns="0" tIns="0" rIns="0" bIns="0" anchor="ctr">
             <a:spAutoFit/>
           </a:bodyPr>
           <a:lstStyle/>
@@ -6483,7 +6253,7 @@
           </a:fontRef>
         </p:style>
         <p:txBody>
-          <a:bodyPr rtlCol="0" anchor="ctr" lIns="0" rIns="0" tIns="0" bIns="0"/>
+          <a:bodyPr lIns="0" tIns="0" rIns="0" bIns="0" rtlCol="0" anchor="ctr"/>
           <a:lstStyle/>
           <a:p>
             <a:pPr algn="ctr"/>
@@ -6516,7 +6286,7 @@
           <a:noFill/>
         </p:spPr>
         <p:txBody>
-          <a:bodyPr wrap="square" lIns="0" rIns="0" tIns="0" bIns="0" anchor="ctr">
+          <a:bodyPr wrap="square" lIns="0" tIns="0" rIns="0" bIns="0" anchor="ctr">
             <a:spAutoFit/>
           </a:bodyPr>
           <a:lstStyle/>
@@ -6558,7 +6328,7 @@
           <a:noFill/>
         </p:spPr>
         <p:txBody>
-          <a:bodyPr wrap="square" lIns="0" rIns="0" tIns="0" bIns="0" anchor="t">
+          <a:bodyPr wrap="square" lIns="0" tIns="0" rIns="0" bIns="0" anchor="t">
             <a:spAutoFit/>
           </a:bodyPr>
           <a:lstStyle/>
@@ -6622,7 +6392,9 @@
         <p:txBody>
           <a:bodyPr rtlCol="0" anchor="ctr"/>
           <a:lstStyle/>
-          <a:p/>
+          <a:p>
+            <a:endParaRPr/>
+          </a:p>
         </p:txBody>
       </p:sp>
       <p:sp>
@@ -6642,7 +6414,7 @@
           <a:noFill/>
         </p:spPr>
         <p:txBody>
-          <a:bodyPr wrap="square" lIns="0" rIns="0" tIns="0" bIns="0" anchor="t">
+          <a:bodyPr wrap="square" lIns="0" tIns="0" rIns="0" bIns="0" anchor="t">
             <a:spAutoFit/>
           </a:bodyPr>
           <a:lstStyle/>
@@ -6684,7 +6456,7 @@
           <a:noFill/>
         </p:spPr>
         <p:txBody>
-          <a:bodyPr wrap="square" lIns="0" rIns="0" tIns="0" bIns="0" anchor="t">
+          <a:bodyPr wrap="square" lIns="0" tIns="0" rIns="0" bIns="0" anchor="t">
             <a:spAutoFit/>
           </a:bodyPr>
           <a:lstStyle/>
@@ -6718,7 +6490,7 @@
 </file>
 
 <file path=ppt/slides/slide4.xml><?xml version="1.0" encoding="utf-8"?>
-<p:sld xmlns:a="http://schemas.openxmlformats.org/drawingml/2006/main" xmlns:p="http://schemas.openxmlformats.org/presentationml/2006/main" xmlns:r="http://schemas.openxmlformats.org/officeDocument/2006/relationships">
+<p:sld xmlns:a="http://schemas.openxmlformats.org/drawingml/2006/main" xmlns:r="http://schemas.openxmlformats.org/officeDocument/2006/relationships" xmlns:p="http://schemas.openxmlformats.org/presentationml/2006/main">
   <p:cSld>
     <p:bg>
       <p:bgPr>
@@ -6734,7 +6506,14 @@
         <p:cNvGrpSpPr/>
         <p:nvPr/>
       </p:nvGrpSpPr>
-      <p:grpSpPr/>
+      <p:grpSpPr>
+        <a:xfrm>
+          <a:off x="0" y="0"/>
+          <a:ext cx="0" cy="0"/>
+          <a:chOff x="0" y="0"/>
+          <a:chExt cx="0" cy="0"/>
+        </a:xfrm>
+      </p:grpSpPr>
       <p:sp>
         <p:nvSpPr>
           <p:cNvPr id="2" name="TextBox 1"/>
@@ -6752,7 +6531,7 @@
           <a:noFill/>
         </p:spPr>
         <p:txBody>
-          <a:bodyPr wrap="square" lIns="0" rIns="0" tIns="0" bIns="0" anchor="t">
+          <a:bodyPr wrap="square" lIns="0" tIns="0" rIns="0" bIns="0" anchor="t">
             <a:spAutoFit/>
           </a:bodyPr>
           <a:lstStyle/>
@@ -6816,7 +6595,9 @@
         <p:txBody>
           <a:bodyPr rtlCol="0" anchor="ctr"/>
           <a:lstStyle/>
-          <a:p/>
+          <a:p>
+            <a:endParaRPr/>
+          </a:p>
         </p:txBody>
       </p:sp>
       <p:pic>
@@ -6860,7 +6641,7 @@
           <a:noFill/>
         </p:spPr>
         <p:txBody>
-          <a:bodyPr wrap="square" lIns="0" rIns="0" tIns="0" bIns="0" anchor="t">
+          <a:bodyPr wrap="square" lIns="0" tIns="0" rIns="0" bIns="0" anchor="t">
             <a:spAutoFit/>
           </a:bodyPr>
           <a:lstStyle/>
@@ -6924,7 +6705,9 @@
         <p:txBody>
           <a:bodyPr rtlCol="0" anchor="ctr"/>
           <a:lstStyle/>
-          <a:p/>
+          <a:p>
+            <a:endParaRPr/>
+          </a:p>
         </p:txBody>
       </p:sp>
       <p:sp>
@@ -6944,7 +6727,7 @@
           <a:noFill/>
         </p:spPr>
         <p:txBody>
-          <a:bodyPr wrap="square" lIns="0" rIns="0" tIns="0" bIns="0" anchor="t">
+          <a:bodyPr wrap="square" lIns="0" tIns="0" rIns="0" bIns="0" anchor="t">
             <a:spAutoFit/>
           </a:bodyPr>
           <a:lstStyle/>
@@ -7043,7 +6826,7 @@
           <a:noFill/>
         </p:spPr>
         <p:txBody>
-          <a:bodyPr wrap="square" lIns="0" rIns="0" tIns="0" bIns="0" anchor="t">
+          <a:bodyPr wrap="square" lIns="0" tIns="0" rIns="0" bIns="0" anchor="t">
             <a:spAutoFit/>
           </a:bodyPr>
           <a:lstStyle/>
@@ -7107,7 +6890,9 @@
         <p:txBody>
           <a:bodyPr rtlCol="0" anchor="ctr"/>
           <a:lstStyle/>
-          <a:p/>
+          <a:p>
+            <a:endParaRPr/>
+          </a:p>
         </p:txBody>
       </p:sp>
       <p:sp>
@@ -7127,7 +6912,7 @@
           <a:noFill/>
         </p:spPr>
         <p:txBody>
-          <a:bodyPr wrap="square" lIns="0" rIns="0" tIns="0" bIns="0" anchor="t">
+          <a:bodyPr wrap="square" lIns="0" tIns="0" rIns="0" bIns="0" anchor="t">
             <a:spAutoFit/>
           </a:bodyPr>
           <a:lstStyle/>
@@ -7169,7 +6954,7 @@
           <a:noFill/>
         </p:spPr>
         <p:txBody>
-          <a:bodyPr wrap="square" lIns="0" rIns="0" tIns="0" bIns="0" anchor="t">
+          <a:bodyPr wrap="square" lIns="0" tIns="0" rIns="0" bIns="0" anchor="t">
             <a:spAutoFit/>
           </a:bodyPr>
           <a:lstStyle/>
@@ -7211,7 +6996,7 @@
           <a:noFill/>
         </p:spPr>
         <p:txBody>
-          <a:bodyPr wrap="square" lIns="0" rIns="0" tIns="0" bIns="0" anchor="t">
+          <a:bodyPr wrap="square" lIns="0" tIns="0" rIns="0" bIns="0" anchor="t">
             <a:spAutoFit/>
           </a:bodyPr>
           <a:lstStyle/>
@@ -7253,7 +7038,7 @@
           <a:noFill/>
         </p:spPr>
         <p:txBody>
-          <a:bodyPr wrap="square" lIns="0" rIns="0" tIns="0" bIns="0" anchor="t">
+          <a:bodyPr wrap="square" lIns="0" tIns="0" rIns="0" bIns="0" anchor="t">
             <a:spAutoFit/>
           </a:bodyPr>
           <a:lstStyle/>
@@ -7317,7 +7102,9 @@
         <p:txBody>
           <a:bodyPr rtlCol="0" anchor="ctr"/>
           <a:lstStyle/>
-          <a:p/>
+          <a:p>
+            <a:endParaRPr/>
+          </a:p>
         </p:txBody>
       </p:sp>
       <p:sp>
@@ -7337,7 +7124,7 @@
           <a:noFill/>
         </p:spPr>
         <p:txBody>
-          <a:bodyPr wrap="square" lIns="0" rIns="0" tIns="0" bIns="0" anchor="t">
+          <a:bodyPr wrap="square" lIns="0" tIns="0" rIns="0" bIns="0" anchor="t">
             <a:spAutoFit/>
           </a:bodyPr>
           <a:lstStyle/>
@@ -7379,7 +7166,7 @@
           <a:noFill/>
         </p:spPr>
         <p:txBody>
-          <a:bodyPr wrap="square" lIns="0" rIns="0" tIns="0" bIns="0" anchor="t">
+          <a:bodyPr wrap="square" lIns="0" tIns="0" rIns="0" bIns="0" anchor="t">
             <a:spAutoFit/>
           </a:bodyPr>
           <a:lstStyle/>
@@ -7413,7 +7200,7 @@
 </file>
 
 <file path=ppt/slides/slide5.xml><?xml version="1.0" encoding="utf-8"?>
-<p:sld xmlns:a="http://schemas.openxmlformats.org/drawingml/2006/main" xmlns:p="http://schemas.openxmlformats.org/presentationml/2006/main" xmlns:r="http://schemas.openxmlformats.org/officeDocument/2006/relationships">
+<p:sld xmlns:a="http://schemas.openxmlformats.org/drawingml/2006/main" xmlns:r="http://schemas.openxmlformats.org/officeDocument/2006/relationships" xmlns:p="http://schemas.openxmlformats.org/presentationml/2006/main">
   <p:cSld>
     <p:bg>
       <p:bgPr>
@@ -7429,7 +7216,14 @@
         <p:cNvGrpSpPr/>
         <p:nvPr/>
       </p:nvGrpSpPr>
-      <p:grpSpPr/>
+      <p:grpSpPr>
+        <a:xfrm>
+          <a:off x="0" y="0"/>
+          <a:ext cx="0" cy="0"/>
+          <a:chOff x="0" y="0"/>
+          <a:chExt cx="0" cy="0"/>
+        </a:xfrm>
+      </p:grpSpPr>
       <p:sp>
         <p:nvSpPr>
           <p:cNvPr id="2" name="TextBox 1"/>
@@ -7447,7 +7241,7 @@
           <a:noFill/>
         </p:spPr>
         <p:txBody>
-          <a:bodyPr wrap="square" lIns="0" rIns="0" tIns="0" bIns="0" anchor="t">
+          <a:bodyPr wrap="square" lIns="0" tIns="0" rIns="0" bIns="0" anchor="t">
             <a:spAutoFit/>
           </a:bodyPr>
           <a:lstStyle/>
@@ -7489,7 +7283,7 @@
           <a:noFill/>
         </p:spPr>
         <p:txBody>
-          <a:bodyPr wrap="square" lIns="0" rIns="0" tIns="0" bIns="0" anchor="t">
+          <a:bodyPr wrap="square" lIns="0" tIns="0" rIns="0" bIns="0" anchor="t">
             <a:spAutoFit/>
           </a:bodyPr>
           <a:lstStyle/>
@@ -7553,7 +7347,9 @@
         <p:txBody>
           <a:bodyPr rtlCol="0" anchor="ctr"/>
           <a:lstStyle/>
-          <a:p/>
+          <a:p>
+            <a:endParaRPr/>
+          </a:p>
         </p:txBody>
       </p:sp>
       <p:sp>
@@ -7593,7 +7389,7 @@
           </a:fontRef>
         </p:style>
         <p:txBody>
-          <a:bodyPr rtlCol="0" anchor="ctr" lIns="0" rIns="0" tIns="0" bIns="0"/>
+          <a:bodyPr lIns="0" tIns="0" rIns="0" bIns="0" rtlCol="0" anchor="ctr"/>
           <a:lstStyle/>
           <a:p>
             <a:pPr algn="ctr"/>
@@ -7626,7 +7422,7 @@
           <a:noFill/>
         </p:spPr>
         <p:txBody>
-          <a:bodyPr wrap="square" lIns="0" rIns="0" tIns="0" bIns="0" anchor="t">
+          <a:bodyPr wrap="square" lIns="0" tIns="0" rIns="0" bIns="0" anchor="t">
             <a:spAutoFit/>
           </a:bodyPr>
           <a:lstStyle/>
@@ -7668,7 +7464,7 @@
           <a:noFill/>
         </p:spPr>
         <p:txBody>
-          <a:bodyPr wrap="square" lIns="0" rIns="0" tIns="0" bIns="0" anchor="t">
+          <a:bodyPr wrap="square" lIns="0" tIns="0" rIns="0" bIns="0" anchor="t">
             <a:spAutoFit/>
           </a:bodyPr>
           <a:lstStyle/>
@@ -7732,7 +7528,9 @@
         <p:txBody>
           <a:bodyPr rtlCol="0" anchor="ctr"/>
           <a:lstStyle/>
-          <a:p/>
+          <a:p>
+            <a:endParaRPr/>
+          </a:p>
         </p:txBody>
       </p:sp>
       <p:sp>
@@ -7772,7 +7570,7 @@
           </a:fontRef>
         </p:style>
         <p:txBody>
-          <a:bodyPr rtlCol="0" anchor="ctr" lIns="0" rIns="0" tIns="0" bIns="0"/>
+          <a:bodyPr lIns="0" tIns="0" rIns="0" bIns="0" rtlCol="0" anchor="ctr"/>
           <a:lstStyle/>
           <a:p>
             <a:pPr algn="ctr"/>
@@ -7805,7 +7603,7 @@
           <a:noFill/>
         </p:spPr>
         <p:txBody>
-          <a:bodyPr wrap="square" lIns="0" rIns="0" tIns="0" bIns="0" anchor="t">
+          <a:bodyPr wrap="square" lIns="0" tIns="0" rIns="0" bIns="0" anchor="t">
             <a:spAutoFit/>
           </a:bodyPr>
           <a:lstStyle/>
@@ -7847,7 +7645,7 @@
           <a:noFill/>
         </p:spPr>
         <p:txBody>
-          <a:bodyPr wrap="square" lIns="0" rIns="0" tIns="0" bIns="0" anchor="t">
+          <a:bodyPr wrap="square" lIns="0" tIns="0" rIns="0" bIns="0" anchor="t">
             <a:spAutoFit/>
           </a:bodyPr>
           <a:lstStyle/>
@@ -7911,7 +7709,9 @@
         <p:txBody>
           <a:bodyPr rtlCol="0" anchor="ctr"/>
           <a:lstStyle/>
-          <a:p/>
+          <a:p>
+            <a:endParaRPr/>
+          </a:p>
         </p:txBody>
       </p:sp>
       <p:sp>
@@ -7951,7 +7751,7 @@
           </a:fontRef>
         </p:style>
         <p:txBody>
-          <a:bodyPr rtlCol="0" anchor="ctr" lIns="0" rIns="0" tIns="0" bIns="0"/>
+          <a:bodyPr lIns="0" tIns="0" rIns="0" bIns="0" rtlCol="0" anchor="ctr"/>
           <a:lstStyle/>
           <a:p>
             <a:pPr algn="ctr"/>
@@ -7984,7 +7784,7 @@
           <a:noFill/>
         </p:spPr>
         <p:txBody>
-          <a:bodyPr wrap="square" lIns="0" rIns="0" tIns="0" bIns="0" anchor="t">
+          <a:bodyPr wrap="square" lIns="0" tIns="0" rIns="0" bIns="0" anchor="t">
             <a:spAutoFit/>
           </a:bodyPr>
           <a:lstStyle/>
@@ -8026,7 +7826,7 @@
           <a:noFill/>
         </p:spPr>
         <p:txBody>
-          <a:bodyPr wrap="square" lIns="0" rIns="0" tIns="0" bIns="0" anchor="t">
+          <a:bodyPr wrap="square" lIns="0" tIns="0" rIns="0" bIns="0" anchor="t">
             <a:spAutoFit/>
           </a:bodyPr>
           <a:lstStyle/>
@@ -8090,7 +7890,9 @@
         <p:txBody>
           <a:bodyPr rtlCol="0" anchor="ctr"/>
           <a:lstStyle/>
-          <a:p/>
+          <a:p>
+            <a:endParaRPr/>
+          </a:p>
         </p:txBody>
       </p:sp>
       <p:sp>
@@ -8130,7 +7932,7 @@
           </a:fontRef>
         </p:style>
         <p:txBody>
-          <a:bodyPr rtlCol="0" anchor="ctr" lIns="0" rIns="0" tIns="0" bIns="0"/>
+          <a:bodyPr lIns="0" tIns="0" rIns="0" bIns="0" rtlCol="0" anchor="ctr"/>
           <a:lstStyle/>
           <a:p>
             <a:pPr algn="ctr"/>
@@ -8163,7 +7965,7 @@
           <a:noFill/>
         </p:spPr>
         <p:txBody>
-          <a:bodyPr wrap="square" lIns="0" rIns="0" tIns="0" bIns="0" anchor="t">
+          <a:bodyPr wrap="square" lIns="0" tIns="0" rIns="0" bIns="0" anchor="t">
             <a:spAutoFit/>
           </a:bodyPr>
           <a:lstStyle/>
@@ -8205,7 +8007,7 @@
           <a:noFill/>
         </p:spPr>
         <p:txBody>
-          <a:bodyPr wrap="square" lIns="0" rIns="0" tIns="0" bIns="0" anchor="t">
+          <a:bodyPr wrap="square" lIns="0" tIns="0" rIns="0" bIns="0" anchor="t">
             <a:spAutoFit/>
           </a:bodyPr>
           <a:lstStyle/>
@@ -8269,7 +8071,9 @@
         <p:txBody>
           <a:bodyPr rtlCol="0" anchor="ctr"/>
           <a:lstStyle/>
-          <a:p/>
+          <a:p>
+            <a:endParaRPr/>
+          </a:p>
         </p:txBody>
       </p:sp>
       <p:sp>
@@ -8289,7 +8093,7 @@
           <a:noFill/>
         </p:spPr>
         <p:txBody>
-          <a:bodyPr wrap="square" lIns="0" rIns="0" tIns="0" bIns="0" anchor="t">
+          <a:bodyPr wrap="square" lIns="0" tIns="0" rIns="0" bIns="0" anchor="t">
             <a:spAutoFit/>
           </a:bodyPr>
           <a:lstStyle/>
@@ -8331,7 +8135,7 @@
           <a:noFill/>
         </p:spPr>
         <p:txBody>
-          <a:bodyPr wrap="square" lIns="0" rIns="0" tIns="0" bIns="0" anchor="t">
+          <a:bodyPr wrap="square" lIns="0" tIns="0" rIns="0" bIns="0" anchor="t">
             <a:spAutoFit/>
           </a:bodyPr>
           <a:lstStyle/>
@@ -8374,7 +8178,7 @@
           <a:noFill/>
         </p:spPr>
         <p:txBody>
-          <a:bodyPr wrap="square" lIns="0" rIns="0" tIns="0" bIns="0" anchor="t">
+          <a:bodyPr wrap="square" lIns="0" tIns="0" rIns="0" bIns="0" anchor="t">
             <a:spAutoFit/>
           </a:bodyPr>
           <a:lstStyle/>
@@ -8416,7 +8220,7 @@
           <a:noFill/>
         </p:spPr>
         <p:txBody>
-          <a:bodyPr wrap="square" lIns="0" rIns="0" tIns="0" bIns="0" anchor="t">
+          <a:bodyPr wrap="square" lIns="0" tIns="0" rIns="0" bIns="0" anchor="t">
             <a:spAutoFit/>
           </a:bodyPr>
           <a:lstStyle/>
@@ -8480,7 +8284,9 @@
         <p:txBody>
           <a:bodyPr rtlCol="0" anchor="ctr"/>
           <a:lstStyle/>
-          <a:p/>
+          <a:p>
+            <a:endParaRPr/>
+          </a:p>
         </p:txBody>
       </p:sp>
       <p:sp>
@@ -8500,7 +8306,7 @@
           <a:noFill/>
         </p:spPr>
         <p:txBody>
-          <a:bodyPr wrap="square" lIns="0" rIns="0" tIns="0" bIns="0" anchor="t">
+          <a:bodyPr wrap="square" lIns="0" tIns="0" rIns="0" bIns="0" anchor="t">
             <a:spAutoFit/>
           </a:bodyPr>
           <a:lstStyle/>
@@ -8542,7 +8348,7 @@
           <a:noFill/>
         </p:spPr>
         <p:txBody>
-          <a:bodyPr wrap="square" lIns="0" rIns="0" tIns="0" bIns="0" anchor="t">
+          <a:bodyPr wrap="square" lIns="0" tIns="0" rIns="0" bIns="0" anchor="t">
             <a:spAutoFit/>
           </a:bodyPr>
           <a:lstStyle/>
@@ -8576,7 +8382,7 @@
 </file>
 
 <file path=ppt/slides/slide6.xml><?xml version="1.0" encoding="utf-8"?>
-<p:sld xmlns:a="http://schemas.openxmlformats.org/drawingml/2006/main" xmlns:p="http://schemas.openxmlformats.org/presentationml/2006/main" xmlns:r="http://schemas.openxmlformats.org/officeDocument/2006/relationships">
+<p:sld xmlns:a="http://schemas.openxmlformats.org/drawingml/2006/main" xmlns:r="http://schemas.openxmlformats.org/officeDocument/2006/relationships" xmlns:p="http://schemas.openxmlformats.org/presentationml/2006/main">
   <p:cSld>
     <p:bg>
       <p:bgPr>
@@ -8592,7 +8398,14 @@
         <p:cNvGrpSpPr/>
         <p:nvPr/>
       </p:nvGrpSpPr>
-      <p:grpSpPr/>
+      <p:grpSpPr>
+        <a:xfrm>
+          <a:off x="0" y="0"/>
+          <a:ext cx="0" cy="0"/>
+          <a:chOff x="0" y="0"/>
+          <a:chExt cx="0" cy="0"/>
+        </a:xfrm>
+      </p:grpSpPr>
       <p:sp>
         <p:nvSpPr>
           <p:cNvPr id="2" name="TextBox 1"/>
@@ -8610,7 +8423,7 @@
           <a:noFill/>
         </p:spPr>
         <p:txBody>
-          <a:bodyPr wrap="square" lIns="0" rIns="0" tIns="0" bIns="0" anchor="t">
+          <a:bodyPr wrap="square" lIns="0" tIns="0" rIns="0" bIns="0" anchor="t">
             <a:spAutoFit/>
           </a:bodyPr>
           <a:lstStyle/>
@@ -8652,7 +8465,7 @@
           <a:noFill/>
         </p:spPr>
         <p:txBody>
-          <a:bodyPr wrap="square" lIns="0" rIns="0" tIns="0" bIns="0" anchor="t">
+          <a:bodyPr wrap="square" lIns="0" tIns="0" rIns="0" bIns="0" anchor="t">
             <a:spAutoFit/>
           </a:bodyPr>
           <a:lstStyle/>
@@ -8718,7 +8531,9 @@
         <p:txBody>
           <a:bodyPr rtlCol="0" anchor="ctr"/>
           <a:lstStyle/>
-          <a:p/>
+          <a:p>
+            <a:endParaRPr/>
+          </a:p>
         </p:txBody>
       </p:sp>
       <p:sp>
@@ -8738,7 +8553,7 @@
           <a:noFill/>
         </p:spPr>
         <p:txBody>
-          <a:bodyPr wrap="square" lIns="0" rIns="0" tIns="0" bIns="0" anchor="t">
+          <a:bodyPr wrap="square" lIns="0" tIns="0" rIns="0" bIns="0" anchor="t">
             <a:spAutoFit/>
           </a:bodyPr>
           <a:lstStyle/>
@@ -8802,7 +8617,9 @@
         <p:txBody>
           <a:bodyPr rtlCol="0" anchor="ctr"/>
           <a:lstStyle/>
-          <a:p/>
+          <a:p>
+            <a:endParaRPr/>
+          </a:p>
         </p:txBody>
       </p:sp>
       <p:sp>
@@ -8822,7 +8639,7 @@
           <a:noFill/>
         </p:spPr>
         <p:txBody>
-          <a:bodyPr wrap="square" lIns="0" rIns="0" tIns="0" bIns="0" anchor="t">
+          <a:bodyPr wrap="square" lIns="0" tIns="0" rIns="0" bIns="0" anchor="t">
             <a:spAutoFit/>
           </a:bodyPr>
           <a:lstStyle/>
@@ -8864,7 +8681,7 @@
           <a:noFill/>
         </p:spPr>
         <p:txBody>
-          <a:bodyPr wrap="square" lIns="0" rIns="0" tIns="0" bIns="0" anchor="t">
+          <a:bodyPr wrap="square" lIns="0" tIns="0" rIns="0" bIns="0" anchor="t">
             <a:spAutoFit/>
           </a:bodyPr>
           <a:lstStyle/>
@@ -8906,7 +8723,7 @@
           <a:noFill/>
         </p:spPr>
         <p:txBody>
-          <a:bodyPr wrap="square" lIns="0" rIns="0" tIns="0" bIns="0" anchor="t">
+          <a:bodyPr wrap="square" lIns="0" tIns="0" rIns="0" bIns="0" anchor="t">
             <a:spAutoFit/>
           </a:bodyPr>
           <a:lstStyle/>
@@ -8948,7 +8765,7 @@
           <a:noFill/>
         </p:spPr>
         <p:txBody>
-          <a:bodyPr wrap="square" lIns="0" rIns="0" tIns="0" bIns="0" anchor="t">
+          <a:bodyPr wrap="square" lIns="0" tIns="0" rIns="0" bIns="0" anchor="t">
             <a:spAutoFit/>
           </a:bodyPr>
           <a:lstStyle/>
@@ -9014,7 +8831,9 @@
         <p:txBody>
           <a:bodyPr rtlCol="0" anchor="ctr"/>
           <a:lstStyle/>
-          <a:p/>
+          <a:p>
+            <a:endParaRPr/>
+          </a:p>
         </p:txBody>
       </p:sp>
       <p:sp>
@@ -9034,7 +8853,7 @@
           <a:noFill/>
         </p:spPr>
         <p:txBody>
-          <a:bodyPr wrap="square" lIns="0" rIns="0" tIns="0" bIns="0" anchor="t">
+          <a:bodyPr wrap="square" lIns="0" tIns="0" rIns="0" bIns="0" anchor="t">
             <a:spAutoFit/>
           </a:bodyPr>
           <a:lstStyle/>
@@ -9098,7 +8917,9 @@
         <p:txBody>
           <a:bodyPr rtlCol="0" anchor="ctr"/>
           <a:lstStyle/>
-          <a:p/>
+          <a:p>
+            <a:endParaRPr/>
+          </a:p>
         </p:txBody>
       </p:sp>
       <p:sp>
@@ -9118,7 +8939,7 @@
           <a:noFill/>
         </p:spPr>
         <p:txBody>
-          <a:bodyPr wrap="square" lIns="0" rIns="0" tIns="0" bIns="0" anchor="t">
+          <a:bodyPr wrap="square" lIns="0" tIns="0" rIns="0" bIns="0" anchor="t">
             <a:spAutoFit/>
           </a:bodyPr>
           <a:lstStyle/>
@@ -9160,7 +8981,7 @@
           <a:noFill/>
         </p:spPr>
         <p:txBody>
-          <a:bodyPr wrap="square" lIns="0" rIns="0" tIns="0" bIns="0" anchor="t">
+          <a:bodyPr wrap="square" lIns="0" tIns="0" rIns="0" bIns="0" anchor="t">
             <a:spAutoFit/>
           </a:bodyPr>
           <a:lstStyle/>
@@ -9202,7 +9023,7 @@
           <a:noFill/>
         </p:spPr>
         <p:txBody>
-          <a:bodyPr wrap="square" lIns="0" rIns="0" tIns="0" bIns="0" anchor="t">
+          <a:bodyPr wrap="square" lIns="0" tIns="0" rIns="0" bIns="0" anchor="t">
             <a:spAutoFit/>
           </a:bodyPr>
           <a:lstStyle/>
@@ -9244,7 +9065,7 @@
           <a:noFill/>
         </p:spPr>
         <p:txBody>
-          <a:bodyPr wrap="square" lIns="0" rIns="0" tIns="0" bIns="0" anchor="t">
+          <a:bodyPr wrap="square" lIns="0" tIns="0" rIns="0" bIns="0" anchor="t">
             <a:spAutoFit/>
           </a:bodyPr>
           <a:lstStyle/>
@@ -9286,7 +9107,7 @@
           <a:noFill/>
         </p:spPr>
         <p:txBody>
-          <a:bodyPr wrap="square" lIns="0" rIns="0" tIns="0" bIns="0" anchor="t">
+          <a:bodyPr wrap="square" lIns="0" tIns="0" rIns="0" bIns="0" anchor="t">
             <a:spAutoFit/>
           </a:bodyPr>
           <a:lstStyle/>
@@ -9350,7 +9171,9 @@
         <p:txBody>
           <a:bodyPr rtlCol="0" anchor="ctr"/>
           <a:lstStyle/>
-          <a:p/>
+          <a:p>
+            <a:endParaRPr/>
+          </a:p>
         </p:txBody>
       </p:sp>
       <p:sp>
@@ -9370,7 +9193,7 @@
           <a:noFill/>
         </p:spPr>
         <p:txBody>
-          <a:bodyPr wrap="square" lIns="0" rIns="0" tIns="0" bIns="0" anchor="t">
+          <a:bodyPr wrap="square" lIns="0" tIns="0" rIns="0" bIns="0" anchor="t">
             <a:spAutoFit/>
           </a:bodyPr>
           <a:lstStyle/>
@@ -9412,7 +9235,7 @@
           <a:noFill/>
         </p:spPr>
         <p:txBody>
-          <a:bodyPr wrap="square" lIns="0" rIns="0" tIns="0" bIns="0" anchor="t">
+          <a:bodyPr wrap="square" lIns="0" tIns="0" rIns="0" bIns="0" anchor="t">
             <a:spAutoFit/>
           </a:bodyPr>
           <a:lstStyle/>
@@ -9446,7 +9269,7 @@
 </file>
 
 <file path=ppt/slides/slide7.xml><?xml version="1.0" encoding="utf-8"?>
-<p:sld xmlns:a="http://schemas.openxmlformats.org/drawingml/2006/main" xmlns:p="http://schemas.openxmlformats.org/presentationml/2006/main" xmlns:r="http://schemas.openxmlformats.org/officeDocument/2006/relationships">
+<p:sld xmlns:a="http://schemas.openxmlformats.org/drawingml/2006/main" xmlns:r="http://schemas.openxmlformats.org/officeDocument/2006/relationships" xmlns:p="http://schemas.openxmlformats.org/presentationml/2006/main">
   <p:cSld>
     <p:bg>
       <p:bgPr>
@@ -9462,7 +9285,14 @@
         <p:cNvGrpSpPr/>
         <p:nvPr/>
       </p:nvGrpSpPr>
-      <p:grpSpPr/>
+      <p:grpSpPr>
+        <a:xfrm>
+          <a:off x="0" y="0"/>
+          <a:ext cx="0" cy="0"/>
+          <a:chOff x="0" y="0"/>
+          <a:chExt cx="0" cy="0"/>
+        </a:xfrm>
+      </p:grpSpPr>
       <p:sp>
         <p:nvSpPr>
           <p:cNvPr id="2" name="TextBox 1"/>
@@ -9480,7 +9310,7 @@
           <a:noFill/>
         </p:spPr>
         <p:txBody>
-          <a:bodyPr wrap="square" lIns="0" rIns="0" tIns="0" bIns="0" anchor="t">
+          <a:bodyPr wrap="square" lIns="0" tIns="0" rIns="0" bIns="0" anchor="t">
             <a:spAutoFit/>
           </a:bodyPr>
           <a:lstStyle/>
@@ -9522,7 +9352,7 @@
           <a:noFill/>
         </p:spPr>
         <p:txBody>
-          <a:bodyPr wrap="square" lIns="0" rIns="0" tIns="0" bIns="0" anchor="t">
+          <a:bodyPr wrap="square" lIns="0" tIns="0" rIns="0" bIns="0" anchor="t">
             <a:spAutoFit/>
           </a:bodyPr>
           <a:lstStyle/>
@@ -9564,7 +9394,7 @@
           <a:noFill/>
         </p:spPr>
         <p:txBody>
-          <a:bodyPr wrap="square" lIns="0" rIns="0" tIns="0" bIns="0" anchor="t">
+          <a:bodyPr wrap="square" lIns="0" tIns="0" rIns="0" bIns="0" anchor="t">
             <a:spAutoFit/>
           </a:bodyPr>
           <a:lstStyle/>
@@ -9606,7 +9436,7 @@
           <a:noFill/>
         </p:spPr>
         <p:txBody>
-          <a:bodyPr wrap="square" lIns="0" rIns="0" tIns="0" bIns="0" anchor="t">
+          <a:bodyPr wrap="square" lIns="0" tIns="0" rIns="0" bIns="0" anchor="t">
             <a:spAutoFit/>
           </a:bodyPr>
           <a:lstStyle/>
@@ -9648,7 +9478,7 @@
           <a:noFill/>
         </p:spPr>
         <p:txBody>
-          <a:bodyPr wrap="square" lIns="0" rIns="0" tIns="0" bIns="0" anchor="t">
+          <a:bodyPr wrap="square" lIns="0" tIns="0" rIns="0" bIns="0" anchor="t">
             <a:spAutoFit/>
           </a:bodyPr>
           <a:lstStyle/>
@@ -9690,7 +9520,7 @@
           <a:noFill/>
         </p:spPr>
         <p:txBody>
-          <a:bodyPr wrap="square" lIns="0" rIns="0" tIns="0" bIns="0" anchor="t">
+          <a:bodyPr wrap="square" lIns="0" tIns="0" rIns="0" bIns="0" anchor="t">
             <a:spAutoFit/>
           </a:bodyPr>
           <a:lstStyle/>
@@ -9732,7 +9562,7 @@
           <a:noFill/>
         </p:spPr>
         <p:txBody>
-          <a:bodyPr wrap="square" lIns="0" rIns="0" tIns="0" bIns="0" anchor="t">
+          <a:bodyPr wrap="square" lIns="0" tIns="0" rIns="0" bIns="0" anchor="t">
             <a:spAutoFit/>
           </a:bodyPr>
           <a:lstStyle/>
@@ -9774,7 +9604,7 @@
           <a:noFill/>
         </p:spPr>
         <p:txBody>
-          <a:bodyPr wrap="square" lIns="0" rIns="0" tIns="0" bIns="0" anchor="t">
+          <a:bodyPr wrap="square" lIns="0" tIns="0" rIns="0" bIns="0" anchor="t">
             <a:spAutoFit/>
           </a:bodyPr>
           <a:lstStyle/>
@@ -9816,7 +9646,7 @@
           <a:noFill/>
         </p:spPr>
         <p:txBody>
-          <a:bodyPr wrap="square" lIns="0" rIns="0" tIns="0" bIns="0" anchor="t">
+          <a:bodyPr wrap="square" lIns="0" tIns="0" rIns="0" bIns="0" anchor="t">
             <a:spAutoFit/>
           </a:bodyPr>
           <a:lstStyle/>
@@ -9858,7 +9688,7 @@
           <a:noFill/>
         </p:spPr>
         <p:txBody>
-          <a:bodyPr wrap="square" lIns="0" rIns="0" tIns="0" bIns="0" anchor="t">
+          <a:bodyPr wrap="square" lIns="0" tIns="0" rIns="0" bIns="0" anchor="t">
             <a:spAutoFit/>
           </a:bodyPr>
           <a:lstStyle/>
@@ -9922,7 +9752,9 @@
         <p:txBody>
           <a:bodyPr rtlCol="0" anchor="ctr"/>
           <a:lstStyle/>
-          <a:p/>
+          <a:p>
+            <a:endParaRPr/>
+          </a:p>
         </p:txBody>
       </p:sp>
       <p:sp>
@@ -9942,7 +9774,7 @@
           <a:noFill/>
         </p:spPr>
         <p:txBody>
-          <a:bodyPr wrap="square" lIns="0" rIns="0" tIns="0" bIns="0" anchor="t">
+          <a:bodyPr wrap="square" lIns="0" tIns="0" rIns="0" bIns="0" anchor="t">
             <a:spAutoFit/>
           </a:bodyPr>
           <a:lstStyle/>
@@ -10006,7 +9838,9 @@
         <p:txBody>
           <a:bodyPr rtlCol="0" anchor="ctr"/>
           <a:lstStyle/>
-          <a:p/>
+          <a:p>
+            <a:endParaRPr/>
+          </a:p>
         </p:txBody>
       </p:sp>
       <p:sp>
@@ -10046,7 +9880,7 @@
           </a:fontRef>
         </p:style>
         <p:txBody>
-          <a:bodyPr rtlCol="0" anchor="ctr" lIns="0" rIns="0" tIns="0" bIns="0"/>
+          <a:bodyPr lIns="0" tIns="0" rIns="0" bIns="0" rtlCol="0" anchor="ctr"/>
           <a:lstStyle/>
           <a:p>
             <a:pPr algn="ctr"/>
@@ -10079,7 +9913,7 @@
           <a:noFill/>
         </p:spPr>
         <p:txBody>
-          <a:bodyPr wrap="square" lIns="0" rIns="0" tIns="0" bIns="0" anchor="ctr">
+          <a:bodyPr wrap="square" lIns="0" tIns="0" rIns="0" bIns="0" anchor="ctr">
             <a:spAutoFit/>
           </a:bodyPr>
           <a:lstStyle/>
@@ -10145,7 +9979,9 @@
         <p:txBody>
           <a:bodyPr rtlCol="0" anchor="ctr"/>
           <a:lstStyle/>
-          <a:p/>
+          <a:p>
+            <a:endParaRPr/>
+          </a:p>
         </p:txBody>
       </p:sp>
       <p:sp>
@@ -10185,7 +10021,7 @@
           </a:fontRef>
         </p:style>
         <p:txBody>
-          <a:bodyPr rtlCol="0" anchor="ctr" lIns="0" rIns="0" tIns="0" bIns="0"/>
+          <a:bodyPr lIns="0" tIns="0" rIns="0" bIns="0" rtlCol="0" anchor="ctr"/>
           <a:lstStyle/>
           <a:p>
             <a:pPr algn="ctr"/>
@@ -10218,7 +10054,7 @@
           <a:noFill/>
         </p:spPr>
         <p:txBody>
-          <a:bodyPr wrap="square" lIns="0" rIns="0" tIns="0" bIns="0" anchor="ctr">
+          <a:bodyPr wrap="square" lIns="0" tIns="0" rIns="0" bIns="0" anchor="ctr">
             <a:spAutoFit/>
           </a:bodyPr>
           <a:lstStyle/>
@@ -10282,7 +10118,9 @@
         <p:txBody>
           <a:bodyPr rtlCol="0" anchor="ctr"/>
           <a:lstStyle/>
-          <a:p/>
+          <a:p>
+            <a:endParaRPr/>
+          </a:p>
         </p:txBody>
       </p:sp>
       <p:sp>
@@ -10322,7 +10160,7 @@
           </a:fontRef>
         </p:style>
         <p:txBody>
-          <a:bodyPr rtlCol="0" anchor="ctr" lIns="0" rIns="0" tIns="0" bIns="0"/>
+          <a:bodyPr lIns="0" tIns="0" rIns="0" bIns="0" rtlCol="0" anchor="ctr"/>
           <a:lstStyle/>
           <a:p>
             <a:pPr algn="ctr"/>
@@ -10355,7 +10193,7 @@
           <a:noFill/>
         </p:spPr>
         <p:txBody>
-          <a:bodyPr wrap="square" lIns="0" rIns="0" tIns="0" bIns="0" anchor="ctr">
+          <a:bodyPr wrap="square" lIns="0" tIns="0" rIns="0" bIns="0" anchor="ctr">
             <a:spAutoFit/>
           </a:bodyPr>
           <a:lstStyle/>
@@ -10421,7 +10259,9 @@
         <p:txBody>
           <a:bodyPr rtlCol="0" anchor="ctr"/>
           <a:lstStyle/>
-          <a:p/>
+          <a:p>
+            <a:endParaRPr/>
+          </a:p>
         </p:txBody>
       </p:sp>
       <p:sp>
@@ -10461,7 +10301,7 @@
           </a:fontRef>
         </p:style>
         <p:txBody>
-          <a:bodyPr rtlCol="0" anchor="ctr" lIns="0" rIns="0" tIns="0" bIns="0"/>
+          <a:bodyPr lIns="0" tIns="0" rIns="0" bIns="0" rtlCol="0" anchor="ctr"/>
           <a:lstStyle/>
           <a:p>
             <a:pPr algn="ctr"/>
@@ -10494,7 +10334,7 @@
           <a:noFill/>
         </p:spPr>
         <p:txBody>
-          <a:bodyPr wrap="square" lIns="0" rIns="0" tIns="0" bIns="0" anchor="ctr">
+          <a:bodyPr wrap="square" lIns="0" tIns="0" rIns="0" bIns="0" anchor="ctr">
             <a:spAutoFit/>
           </a:bodyPr>
           <a:lstStyle/>
@@ -10536,7 +10376,7 @@
           <a:noFill/>
         </p:spPr>
         <p:txBody>
-          <a:bodyPr wrap="square" lIns="0" rIns="0" tIns="0" bIns="0" anchor="t">
+          <a:bodyPr wrap="square" lIns="0" tIns="0" rIns="0" bIns="0" anchor="t">
             <a:spAutoFit/>
           </a:bodyPr>
           <a:lstStyle/>
@@ -10600,7 +10440,9 @@
         <p:txBody>
           <a:bodyPr rtlCol="0" anchor="ctr"/>
           <a:lstStyle/>
-          <a:p/>
+          <a:p>
+            <a:endParaRPr/>
+          </a:p>
         </p:txBody>
       </p:sp>
       <p:sp>
@@ -10620,7 +10462,7 @@
           <a:noFill/>
         </p:spPr>
         <p:txBody>
-          <a:bodyPr wrap="square" lIns="0" rIns="0" tIns="0" bIns="0" anchor="t">
+          <a:bodyPr wrap="square" lIns="0" tIns="0" rIns="0" bIns="0" anchor="t">
             <a:spAutoFit/>
           </a:bodyPr>
           <a:lstStyle/>
@@ -10662,7 +10504,7 @@
           <a:noFill/>
         </p:spPr>
         <p:txBody>
-          <a:bodyPr wrap="square" lIns="0" rIns="0" tIns="0" bIns="0" anchor="t">
+          <a:bodyPr wrap="square" lIns="0" tIns="0" rIns="0" bIns="0" anchor="t">
             <a:spAutoFit/>
           </a:bodyPr>
           <a:lstStyle/>
@@ -10683,326 +10525,6 @@
                 <a:latin typeface="Calibri"/>
               </a:rPr>
               <a:t>7</a:t>
-            </a:r>
-          </a:p>
-        </p:txBody>
-      </p:sp>
-    </p:spTree>
-  </p:cSld>
-  <p:clrMapOvr>
-    <a:masterClrMapping/>
-  </p:clrMapOvr>
-</p:sld>
-</file>
-
-<file path=ppt/slides/slide8.xml><?xml version="1.0" encoding="utf-8"?>
-<p:sld xmlns:a="http://schemas.openxmlformats.org/drawingml/2006/main" xmlns:p="http://schemas.openxmlformats.org/presentationml/2006/main" xmlns:r="http://schemas.openxmlformats.org/officeDocument/2006/relationships">
-  <p:cSld>
-    <p:bg>
-      <p:bgPr>
-        <a:solidFill>
-          <a:srgbClr val="FFFFFF"/>
-        </a:solidFill>
-        <a:effectLst/>
-      </p:bgPr>
-    </p:bg>
-    <p:spTree>
-      <p:nvGrpSpPr>
-        <p:cNvPr id="1" name=""/>
-        <p:cNvGrpSpPr/>
-        <p:nvPr/>
-      </p:nvGrpSpPr>
-      <p:grpSpPr/>
-      <p:sp>
-        <p:nvSpPr>
-          <p:cNvPr id="2" name="TextBox 1"/>
-          <p:cNvSpPr txBox="1"/>
-          <p:nvPr/>
-        </p:nvSpPr>
-        <p:spPr>
-          <a:xfrm>
-            <a:off x="502920" y="320040"/>
-            <a:ext cx="10789920" cy="594360"/>
-          </a:xfrm>
-          <a:prstGeom prst="rect">
-            <a:avLst/>
-          </a:prstGeom>
-          <a:noFill/>
-        </p:spPr>
-        <p:txBody>
-          <a:bodyPr wrap="square" lIns="0" rIns="0" tIns="0" bIns="0" anchor="t">
-            <a:spAutoFit/>
-          </a:bodyPr>
-          <a:lstStyle/>
-          <a:p>
-            <a:pPr algn="l">
-              <a:lnSpc>
-                <a:spcPct val="108000"/>
-              </a:lnSpc>
-              <a:spcAft>
-                <a:spcPts val="0"/>
-              </a:spcAft>
-            </a:pPr>
-            <a:r>
-              <a:rPr sz="2700" b="1">
-                <a:solidFill>
-                  <a:srgbClr val="0021A5"/>
-                </a:solidFill>
-                <a:latin typeface="Calibri"/>
-              </a:rPr>
-              <a:t>Discussion</a:t>
-            </a:r>
-          </a:p>
-        </p:txBody>
-      </p:sp>
-      <p:sp>
-        <p:nvSpPr>
-          <p:cNvPr id="3" name="TextBox 2"/>
-          <p:cNvSpPr txBox="1"/>
-          <p:nvPr/>
-        </p:nvSpPr>
-        <p:spPr>
-          <a:xfrm>
-            <a:off x="731520" y="2377440"/>
-            <a:ext cx="10515600" cy="1463040"/>
-          </a:xfrm>
-          <a:prstGeom prst="rect">
-            <a:avLst/>
-          </a:prstGeom>
-          <a:noFill/>
-        </p:spPr>
-        <p:txBody>
-          <a:bodyPr wrap="square" lIns="0" rIns="0" tIns="0" bIns="0" anchor="t">
-            <a:spAutoFit/>
-          </a:bodyPr>
-          <a:lstStyle/>
-          <a:p>
-            <a:pPr algn="ctr">
-              <a:lnSpc>
-                <a:spcPct val="108000"/>
-              </a:lnSpc>
-              <a:spcAft>
-                <a:spcPts val="0"/>
-              </a:spcAft>
-            </a:pPr>
-            <a:r>
-              <a:rPr sz="3400" b="1">
-                <a:solidFill>
-                  <a:srgbClr val="0021A5"/>
-                </a:solidFill>
-                <a:latin typeface="Calibri"/>
-              </a:rPr>
-              <a:t>What should we verify live next?</a:t>
-            </a:r>
-          </a:p>
-        </p:txBody>
-      </p:sp>
-      <p:sp>
-        <p:nvSpPr>
-          <p:cNvPr id="4" name="TextBox 3"/>
-          <p:cNvSpPr txBox="1"/>
-          <p:nvPr/>
-        </p:nvSpPr>
-        <p:spPr>
-          <a:xfrm>
-            <a:off x="731520" y="3840480"/>
-            <a:ext cx="10515600" cy="365760"/>
-          </a:xfrm>
-          <a:prstGeom prst="rect">
-            <a:avLst/>
-          </a:prstGeom>
-          <a:noFill/>
-        </p:spPr>
-        <p:txBody>
-          <a:bodyPr wrap="square" lIns="0" rIns="0" tIns="0" bIns="0" anchor="t">
-            <a:spAutoFit/>
-          </a:bodyPr>
-          <a:lstStyle/>
-          <a:p>
-            <a:pPr algn="ctr">
-              <a:lnSpc>
-                <a:spcPct val="108000"/>
-              </a:lnSpc>
-              <a:spcAft>
-                <a:spcPts val="0"/>
-              </a:spcAft>
-            </a:pPr>
-            <a:r>
-              <a:rPr sz="1500" b="0">
-                <a:solidFill>
-                  <a:srgbClr val="6B7A8F"/>
-                </a:solidFill>
-                <a:latin typeface="Calibri"/>
-              </a:rPr>
-              <a:t>Zero Trust  ·  the UI  ·  the AML Office — all toggleable, all live-verified</a:t>
-            </a:r>
-          </a:p>
-        </p:txBody>
-      </p:sp>
-      <p:sp>
-        <p:nvSpPr>
-          <p:cNvPr id="5" name="TextBox 4"/>
-          <p:cNvSpPr txBox="1"/>
-          <p:nvPr/>
-        </p:nvSpPr>
-        <p:spPr>
-          <a:xfrm>
-            <a:off x="731520" y="4572000"/>
-            <a:ext cx="10515600" cy="365760"/>
-          </a:xfrm>
-          <a:prstGeom prst="rect">
-            <a:avLst/>
-          </a:prstGeom>
-          <a:noFill/>
-        </p:spPr>
-        <p:txBody>
-          <a:bodyPr wrap="square" lIns="0" rIns="0" tIns="0" bIns="0" anchor="t">
-            <a:spAutoFit/>
-          </a:bodyPr>
-          <a:lstStyle/>
-          <a:p>
-            <a:pPr algn="ctr">
-              <a:lnSpc>
-                <a:spcPct val="108000"/>
-              </a:lnSpc>
-              <a:spcAft>
-                <a:spcPts val="0"/>
-              </a:spcAft>
-            </a:pPr>
-            <a:r>
-              <a:rPr sz="1300" b="0">
-                <a:solidFill>
-                  <a:srgbClr val="6B7A8F"/>
-                </a:solidFill>
-                <a:latin typeface="Calibri"/>
-              </a:rPr>
-              <a:t>Code, papers, and platform guide: the repository. Synthetic data only.</a:t>
-            </a:r>
-          </a:p>
-        </p:txBody>
-      </p:sp>
-      <p:sp>
-        <p:nvSpPr>
-          <p:cNvPr id="6" name="Rectangle 5"/>
-          <p:cNvSpPr/>
-          <p:nvPr/>
-        </p:nvSpPr>
-        <p:spPr>
-          <a:xfrm>
-            <a:off x="502920" y="6382512"/>
-            <a:ext cx="11183112" cy="10972"/>
-          </a:xfrm>
-          <a:prstGeom prst="rect">
-            <a:avLst/>
-          </a:prstGeom>
-          <a:solidFill>
-            <a:srgbClr val="CBD6E2"/>
-          </a:solidFill>
-          <a:ln>
-            <a:noFill/>
-          </a:ln>
-          <a:effectLst/>
-        </p:spPr>
-        <p:style>
-          <a:lnRef idx="1">
-            <a:schemeClr val="accent1"/>
-          </a:lnRef>
-          <a:fillRef idx="3">
-            <a:schemeClr val="accent1"/>
-          </a:fillRef>
-          <a:effectRef idx="2">
-            <a:schemeClr val="accent1"/>
-          </a:effectRef>
-          <a:fontRef idx="minor">
-            <a:schemeClr val="lt1"/>
-          </a:fontRef>
-        </p:style>
-        <p:txBody>
-          <a:bodyPr rtlCol="0" anchor="ctr"/>
-          <a:lstStyle/>
-          <a:p/>
-        </p:txBody>
-      </p:sp>
-      <p:sp>
-        <p:nvSpPr>
-          <p:cNvPr id="7" name="TextBox 6"/>
-          <p:cNvSpPr txBox="1"/>
-          <p:nvPr/>
-        </p:nvSpPr>
-        <p:spPr>
-          <a:xfrm>
-            <a:off x="502920" y="6473952"/>
-            <a:ext cx="8686800" cy="274320"/>
-          </a:xfrm>
-          <a:prstGeom prst="rect">
-            <a:avLst/>
-          </a:prstGeom>
-          <a:noFill/>
-        </p:spPr>
-        <p:txBody>
-          <a:bodyPr wrap="square" lIns="0" rIns="0" tIns="0" bIns="0" anchor="t">
-            <a:spAutoFit/>
-          </a:bodyPr>
-          <a:lstStyle/>
-          <a:p>
-            <a:pPr algn="l">
-              <a:lnSpc>
-                <a:spcPct val="108000"/>
-              </a:lnSpc>
-              <a:spcAft>
-                <a:spcPts val="0"/>
-              </a:spcAft>
-            </a:pPr>
-            <a:r>
-              <a:rPr sz="850" b="0">
-                <a:solidFill>
-                  <a:srgbClr val="6B7A8F"/>
-                </a:solidFill>
-                <a:latin typeface="Calibri"/>
-              </a:rPr>
-              <a:t>U N I V E R S I T Y   O F   F L O R I D A   H E R B E R T   W E R T H E I M   C O L L E G E   O F   E N G I N E E R I N G</a:t>
-            </a:r>
-          </a:p>
-        </p:txBody>
-      </p:sp>
-      <p:sp>
-        <p:nvSpPr>
-          <p:cNvPr id="8" name="TextBox 7"/>
-          <p:cNvSpPr txBox="1"/>
-          <p:nvPr/>
-        </p:nvSpPr>
-        <p:spPr>
-          <a:xfrm>
-            <a:off x="10881360" y="6473952"/>
-            <a:ext cx="822960" cy="274320"/>
-          </a:xfrm>
-          <a:prstGeom prst="rect">
-            <a:avLst/>
-          </a:prstGeom>
-          <a:noFill/>
-        </p:spPr>
-        <p:txBody>
-          <a:bodyPr wrap="square" lIns="0" rIns="0" tIns="0" bIns="0" anchor="t">
-            <a:spAutoFit/>
-          </a:bodyPr>
-          <a:lstStyle/>
-          <a:p>
-            <a:pPr algn="r">
-              <a:lnSpc>
-                <a:spcPct val="108000"/>
-              </a:lnSpc>
-              <a:spcAft>
-                <a:spcPts val="0"/>
-              </a:spcAft>
-            </a:pPr>
-            <a:r>
-              <a:rPr sz="900" b="0">
-                <a:solidFill>
-                  <a:srgbClr val="6B7A8F"/>
-                </a:solidFill>
-                <a:latin typeface="Calibri"/>
-              </a:rPr>
-              <a:t>8</a:t>
             </a:r>
           </a:p>
         </p:txBody>
@@ -11346,44 +10868,44 @@
         <a:sysClr val="window" lastClr="FFFFFF"/>
       </a:lt1>
       <a:dk2>
-        <a:srgbClr val="1F497D"/>
+        <a:srgbClr val="0E2841"/>
       </a:dk2>
       <a:lt2>
-        <a:srgbClr val="EEECE1"/>
+        <a:srgbClr val="E8E8E8"/>
       </a:lt2>
       <a:accent1>
-        <a:srgbClr val="4F81BD"/>
+        <a:srgbClr val="156082"/>
       </a:accent1>
       <a:accent2>
-        <a:srgbClr val="C0504D"/>
+        <a:srgbClr val="E97132"/>
       </a:accent2>
       <a:accent3>
-        <a:srgbClr val="9BBB59"/>
+        <a:srgbClr val="196B24"/>
       </a:accent3>
       <a:accent4>
-        <a:srgbClr val="8064A2"/>
+        <a:srgbClr val="0F9ED5"/>
       </a:accent4>
       <a:accent5>
-        <a:srgbClr val="4BACC6"/>
+        <a:srgbClr val="A02B93"/>
       </a:accent5>
       <a:accent6>
-        <a:srgbClr val="F79646"/>
+        <a:srgbClr val="4EA72E"/>
       </a:accent6>
       <a:hlink>
-        <a:srgbClr val="0000FF"/>
+        <a:srgbClr val="467886"/>
       </a:hlink>
       <a:folHlink>
-        <a:srgbClr val="800080"/>
+        <a:srgbClr val="96607D"/>
       </a:folHlink>
     </a:clrScheme>
     <a:fontScheme name="Office">
       <a:majorFont>
-        <a:latin typeface="Calibri"/>
+        <a:latin typeface="Aptos Display" panose="02110004020202020204"/>
         <a:ea typeface=""/>
         <a:cs typeface=""/>
-        <a:font script="Jpan" typeface="ＭＳ Ｐゴシック"/>
+        <a:font script="Jpan" typeface="游ゴシック Light"/>
         <a:font script="Hang" typeface="맑은 고딕"/>
-        <a:font script="Hans" typeface="宋体"/>
+        <a:font script="Hans" typeface="等线 Light"/>
         <a:font script="Hant" typeface="新細明體"/>
         <a:font script="Arab" typeface="Times New Roman"/>
         <a:font script="Hebr" typeface="Times New Roman"/>
@@ -11411,14 +10933,31 @@
         <a:font script="Viet" typeface="Times New Roman"/>
         <a:font script="Uigh" typeface="Microsoft Uighur"/>
         <a:font script="Geor" typeface="Sylfaen"/>
+        <a:font script="Armn" typeface="Arial"/>
+        <a:font script="Bugi" typeface="Leelawadee UI"/>
+        <a:font script="Bopo" typeface="Microsoft JhengHei"/>
+        <a:font script="Java" typeface="Javanese Text"/>
+        <a:font script="Lisu" typeface="Segoe UI"/>
+        <a:font script="Mymr" typeface="Myanmar Text"/>
+        <a:font script="Nkoo" typeface="Ebrima"/>
+        <a:font script="Olck" typeface="Nirmala UI"/>
+        <a:font script="Osma" typeface="Ebrima"/>
+        <a:font script="Phag" typeface="Phagspa"/>
+        <a:font script="Syrn" typeface="Estrangelo Edessa"/>
+        <a:font script="Syrj" typeface="Estrangelo Edessa"/>
+        <a:font script="Syre" typeface="Estrangelo Edessa"/>
+        <a:font script="Sora" typeface="Nirmala UI"/>
+        <a:font script="Tale" typeface="Microsoft Tai Le"/>
+        <a:font script="Talu" typeface="Microsoft New Tai Lue"/>
+        <a:font script="Tfng" typeface="Ebrima"/>
       </a:majorFont>
       <a:minorFont>
-        <a:latin typeface="Calibri"/>
+        <a:latin typeface="Aptos" panose="02110004020202020204"/>
         <a:ea typeface=""/>
         <a:cs typeface=""/>
-        <a:font script="Jpan" typeface="ＭＳ Ｐゴシック"/>
+        <a:font script="Jpan" typeface="游ゴシック"/>
         <a:font script="Hang" typeface="맑은 고딕"/>
-        <a:font script="Hans" typeface="宋体"/>
+        <a:font script="Hans" typeface="等线"/>
         <a:font script="Hant" typeface="新細明體"/>
         <a:font script="Arab" typeface="Arial"/>
         <a:font script="Hebr" typeface="Arial"/>
@@ -11446,6 +10985,23 @@
         <a:font script="Viet" typeface="Arial"/>
         <a:font script="Uigh" typeface="Microsoft Uighur"/>
         <a:font script="Geor" typeface="Sylfaen"/>
+        <a:font script="Armn" typeface="Arial"/>
+        <a:font script="Bugi" typeface="Leelawadee UI"/>
+        <a:font script="Bopo" typeface="Microsoft JhengHei"/>
+        <a:font script="Java" typeface="Javanese Text"/>
+        <a:font script="Lisu" typeface="Segoe UI"/>
+        <a:font script="Mymr" typeface="Myanmar Text"/>
+        <a:font script="Nkoo" typeface="Ebrima"/>
+        <a:font script="Olck" typeface="Nirmala UI"/>
+        <a:font script="Osma" typeface="Ebrima"/>
+        <a:font script="Phag" typeface="Phagspa"/>
+        <a:font script="Syrn" typeface="Estrangelo Edessa"/>
+        <a:font script="Syrj" typeface="Estrangelo Edessa"/>
+        <a:font script="Syre" typeface="Estrangelo Edessa"/>
+        <a:font script="Sora" typeface="Nirmala UI"/>
+        <a:font script="Tale" typeface="Microsoft Tai Le"/>
+        <a:font script="Talu" typeface="Microsoft New Tai Lue"/>
+        <a:font script="Tfng" typeface="Ebrima"/>
       </a:minorFont>
     </a:fontScheme>
     <a:fmtScheme name="Office">
@@ -11457,180 +11013,136 @@
           <a:gsLst>
             <a:gs pos="0">
               <a:schemeClr val="phClr">
-                <a:tint val="50000"/>
-                <a:satMod val="300000"/>
+                <a:lumMod val="110000"/>
+                <a:satMod val="105000"/>
+                <a:tint val="67000"/>
               </a:schemeClr>
             </a:gs>
-            <a:gs pos="35000">
+            <a:gs pos="50000">
               <a:schemeClr val="phClr">
-                <a:tint val="37000"/>
-                <a:satMod val="300000"/>
+                <a:lumMod val="105000"/>
+                <a:satMod val="103000"/>
+                <a:tint val="73000"/>
               </a:schemeClr>
             </a:gs>
             <a:gs pos="100000">
               <a:schemeClr val="phClr">
-                <a:tint val="15000"/>
-                <a:satMod val="350000"/>
+                <a:lumMod val="105000"/>
+                <a:satMod val="109000"/>
+                <a:tint val="81000"/>
               </a:schemeClr>
             </a:gs>
           </a:gsLst>
-          <a:lin ang="16200000" scaled="1"/>
+          <a:lin ang="5400000" scaled="0"/>
         </a:gradFill>
         <a:gradFill rotWithShape="1">
           <a:gsLst>
             <a:gs pos="0">
               <a:schemeClr val="phClr">
-                <a:tint val="100000"/>
+                <a:satMod val="103000"/>
+                <a:lumMod val="102000"/>
+                <a:tint val="94000"/>
+              </a:schemeClr>
+            </a:gs>
+            <a:gs pos="50000">
+              <a:schemeClr val="phClr">
+                <a:satMod val="110000"/>
+                <a:lumMod val="100000"/>
                 <a:shade val="100000"/>
-                <a:satMod val="130000"/>
               </a:schemeClr>
             </a:gs>
             <a:gs pos="100000">
               <a:schemeClr val="phClr">
-                <a:tint val="50000"/>
-                <a:shade val="100000"/>
-                <a:satMod val="350000"/>
+                <a:lumMod val="99000"/>
+                <a:satMod val="120000"/>
+                <a:shade val="78000"/>
               </a:schemeClr>
             </a:gs>
           </a:gsLst>
-          <a:lin ang="16200000" scaled="0"/>
+          <a:lin ang="5400000" scaled="0"/>
         </a:gradFill>
       </a:fillStyleLst>
       <a:lnStyleLst>
-        <a:ln w="9525" cap="flat" cmpd="sng" algn="ctr">
+        <a:ln w="12700" cap="flat" cmpd="sng" algn="ctr">
           <a:solidFill>
-            <a:schemeClr val="phClr">
-              <a:shade val="95000"/>
-              <a:satMod val="105000"/>
-            </a:schemeClr>
+            <a:schemeClr val="phClr"/>
           </a:solidFill>
           <a:prstDash val="solid"/>
+          <a:miter lim="800000"/>
+        </a:ln>
+        <a:ln w="19050" cap="flat" cmpd="sng" algn="ctr">
+          <a:solidFill>
+            <a:schemeClr val="phClr"/>
+          </a:solidFill>
+          <a:prstDash val="solid"/>
+          <a:miter lim="800000"/>
         </a:ln>
         <a:ln w="25400" cap="flat" cmpd="sng" algn="ctr">
           <a:solidFill>
             <a:schemeClr val="phClr"/>
           </a:solidFill>
           <a:prstDash val="solid"/>
-        </a:ln>
-        <a:ln w="38100" cap="flat" cmpd="sng" algn="ctr">
-          <a:solidFill>
-            <a:schemeClr val="phClr"/>
-          </a:solidFill>
-          <a:prstDash val="solid"/>
+          <a:miter lim="800000"/>
         </a:ln>
       </a:lnStyleLst>
       <a:effectStyleLst>
         <a:effectStyle>
+          <a:effectLst/>
+        </a:effectStyle>
+        <a:effectStyle>
+          <a:effectLst/>
+        </a:effectStyle>
+        <a:effectStyle>
           <a:effectLst>
-            <a:outerShdw blurRad="40000" dist="20000" dir="5400000" rotWithShape="0">
+            <a:outerShdw blurRad="57150" dist="19050" dir="5400000" algn="ctr" rotWithShape="0">
               <a:srgbClr val="000000">
-                <a:alpha val="38000"/>
+                <a:alpha val="63000"/>
               </a:srgbClr>
             </a:outerShdw>
           </a:effectLst>
-        </a:effectStyle>
-        <a:effectStyle>
-          <a:effectLst>
-            <a:outerShdw blurRad="40000" dist="23000" dir="5400000" rotWithShape="0">
-              <a:srgbClr val="000000">
-                <a:alpha val="35000"/>
-              </a:srgbClr>
-            </a:outerShdw>
-          </a:effectLst>
-        </a:effectStyle>
-        <a:effectStyle>
-          <a:effectLst>
-            <a:outerShdw blurRad="40000" dist="23000" dir="5400000" rotWithShape="0">
-              <a:srgbClr val="000000">
-                <a:alpha val="35000"/>
-              </a:srgbClr>
-            </a:outerShdw>
-          </a:effectLst>
-          <a:scene3d>
-            <a:camera prst="orthographicFront">
-              <a:rot lat="0" lon="0" rev="0"/>
-            </a:camera>
-            <a:lightRig rig="threePt" dir="t">
-              <a:rot lat="0" lon="0" rev="1200000"/>
-            </a:lightRig>
-          </a:scene3d>
-          <a:sp3d>
-            <a:bevelT w="63500" h="25400"/>
-          </a:sp3d>
         </a:effectStyle>
       </a:effectStyleLst>
       <a:bgFillStyleLst>
         <a:solidFill>
           <a:schemeClr val="phClr"/>
         </a:solidFill>
+        <a:solidFill>
+          <a:schemeClr val="phClr">
+            <a:tint val="95000"/>
+            <a:satMod val="170000"/>
+          </a:schemeClr>
+        </a:solidFill>
         <a:gradFill rotWithShape="1">
           <a:gsLst>
             <a:gs pos="0">
               <a:schemeClr val="phClr">
-                <a:tint val="40000"/>
-                <a:satMod val="350000"/>
+                <a:tint val="93000"/>
+                <a:satMod val="150000"/>
+                <a:shade val="98000"/>
+                <a:lumMod val="102000"/>
               </a:schemeClr>
             </a:gs>
-            <a:gs pos="40000">
+            <a:gs pos="50000">
               <a:schemeClr val="phClr">
-                <a:tint val="45000"/>
-                <a:shade val="99000"/>
-                <a:satMod val="350000"/>
+                <a:tint val="98000"/>
+                <a:satMod val="130000"/>
+                <a:shade val="90000"/>
+                <a:lumMod val="103000"/>
               </a:schemeClr>
             </a:gs>
             <a:gs pos="100000">
               <a:schemeClr val="phClr">
-                <a:shade val="20000"/>
-                <a:satMod val="255000"/>
+                <a:shade val="63000"/>
+                <a:satMod val="120000"/>
               </a:schemeClr>
             </a:gs>
           </a:gsLst>
-          <a:path path="circle">
-            <a:fillToRect l="50000" t="-80000" r="50000" b="180000"/>
-          </a:path>
-        </a:gradFill>
-        <a:gradFill rotWithShape="1">
-          <a:gsLst>
-            <a:gs pos="0">
-              <a:schemeClr val="phClr">
-                <a:tint val="80000"/>
-                <a:satMod val="300000"/>
-              </a:schemeClr>
-            </a:gs>
-            <a:gs pos="100000">
-              <a:schemeClr val="phClr">
-                <a:shade val="30000"/>
-                <a:satMod val="200000"/>
-              </a:schemeClr>
-            </a:gs>
-          </a:gsLst>
-          <a:path path="circle">
-            <a:fillToRect l="50000" t="50000" r="50000" b="50000"/>
-          </a:path>
+          <a:lin ang="5400000" scaled="0"/>
         </a:gradFill>
       </a:bgFillStyleLst>
     </a:fmtScheme>
   </a:themeElements>
   <a:objectDefaults>
-    <a:spDef>
-      <a:spPr/>
-      <a:bodyPr/>
-      <a:lstStyle/>
-      <a:style>
-        <a:lnRef idx="1">
-          <a:schemeClr val="accent1"/>
-        </a:lnRef>
-        <a:fillRef idx="3">
-          <a:schemeClr val="accent1"/>
-        </a:fillRef>
-        <a:effectRef idx="2">
-          <a:schemeClr val="accent1"/>
-        </a:effectRef>
-        <a:fontRef idx="minor">
-          <a:schemeClr val="lt1"/>
-        </a:fontRef>
-      </a:style>
-    </a:spDef>
     <a:lnDef>
       <a:spPr/>
       <a:bodyPr/>
@@ -11652,5 +11164,10 @@
     </a:lnDef>
   </a:objectDefaults>
   <a:extraClrSchemeLst/>
+  <a:extLst>
+    <a:ext uri="{05A4C25C-085E-4340-85A3-A5531E510DB2}">
+      <thm15:themeFamily xmlns:thm15="http://schemas.microsoft.com/office/thememl/2012/main" name="Office Theme" id="{2E142A2C-CD16-42D6-873A-C26D2A0506FA}" vid="{1BDDFF52-6CD6-40A5-AB3C-68EB2F1E4D0A}"/>
+    </a:ext>
+  </a:extLst>
 </a:theme>
 </file>